--- a/Fff.pptx
+++ b/Fff.pptx
@@ -5,7 +5,7 @@
     <p:sldMasterId id="2147483667" r:id="rId1"/>
   </p:sldMasterIdLst>
   <p:notesMasterIdLst>
-    <p:notesMasterId r:id="rId13"/>
+    <p:notesMasterId r:id="rId15"/>
   </p:notesMasterIdLst>
   <p:sldIdLst>
     <p:sldId id="256" r:id="rId2"/>
@@ -15,10 +15,12 @@
     <p:sldId id="285" r:id="rId6"/>
     <p:sldId id="290" r:id="rId7"/>
     <p:sldId id="286" r:id="rId8"/>
-    <p:sldId id="291" r:id="rId9"/>
-    <p:sldId id="292" r:id="rId10"/>
-    <p:sldId id="287" r:id="rId11"/>
-    <p:sldId id="293" r:id="rId12"/>
+    <p:sldId id="294" r:id="rId9"/>
+    <p:sldId id="295" r:id="rId10"/>
+    <p:sldId id="291" r:id="rId11"/>
+    <p:sldId id="292" r:id="rId12"/>
+    <p:sldId id="287" r:id="rId13"/>
+    <p:sldId id="297" r:id="rId14"/>
   </p:sldIdLst>
   <p:sldSz cx="12192000" cy="6858000"/>
   <p:notesSz cx="6858000" cy="9144000"/>
@@ -3755,6 +3757,8 @@
                 <a:solidFill>
                   <a:schemeClr val="bg1"/>
                 </a:solidFill>
+                <a:latin typeface="Times New Roman" panose="02020603050405020304" pitchFamily="18" charset="0"/>
+                <a:cs typeface="Times New Roman" panose="02020603050405020304" pitchFamily="18" charset="0"/>
               </a:rPr>
               <a:t>Выполнил</a:t>
             </a:r>
@@ -3763,6 +3767,8 @@
                 <a:solidFill>
                   <a:schemeClr val="bg1"/>
                 </a:solidFill>
+                <a:latin typeface="Times New Roman" panose="02020603050405020304" pitchFamily="18" charset="0"/>
+                <a:cs typeface="Times New Roman" panose="02020603050405020304" pitchFamily="18" charset="0"/>
               </a:rPr>
               <a:t>: </a:t>
             </a:r>
@@ -3771,6 +3777,8 @@
                 <a:solidFill>
                   <a:schemeClr val="bg1"/>
                 </a:solidFill>
+                <a:latin typeface="Times New Roman" panose="02020603050405020304" pitchFamily="18" charset="0"/>
+                <a:cs typeface="Times New Roman" panose="02020603050405020304" pitchFamily="18" charset="0"/>
               </a:rPr>
               <a:t>Мирошниченко С. С.</a:t>
             </a:r>
@@ -3804,30 +3812,41 @@
                 <a:solidFill>
                   <a:schemeClr val="bg1"/>
                 </a:solidFill>
-                <a:latin typeface="Verdana" panose="020B0604030504040204" pitchFamily="34" charset="0"/>
+                <a:latin typeface="Times New Roman" panose="02020603050405020304" pitchFamily="18" charset="0"/>
                 <a:ea typeface="Verdana" panose="020B0604030504040204" pitchFamily="34" charset="0"/>
-                <a:cs typeface="Times New Roman"/>
+                <a:cs typeface="Times New Roman" panose="02020603050405020304" pitchFamily="18" charset="0"/>
               </a:rPr>
               <a:t>Курсовой проект по теме </a:t>
+            </a:r>
+            <a:r>
+              <a:rPr lang="en-US" sz="3600" dirty="0">
+                <a:solidFill>
+                  <a:schemeClr val="bg1"/>
+                </a:solidFill>
+                <a:latin typeface="Times New Roman" panose="02020603050405020304" pitchFamily="18" charset="0"/>
+                <a:ea typeface="Verdana" panose="020B0604030504040204" pitchFamily="34" charset="0"/>
+                <a:cs typeface="Times New Roman" panose="02020603050405020304" pitchFamily="18" charset="0"/>
+              </a:rPr>
+              <a:t/>
             </a:r>
             <a:br>
               <a:rPr lang="en-US" sz="3600" dirty="0">
                 <a:solidFill>
                   <a:schemeClr val="bg1"/>
                 </a:solidFill>
-                <a:latin typeface="Verdana" panose="020B0604030504040204" pitchFamily="34" charset="0"/>
+                <a:latin typeface="Times New Roman" panose="02020603050405020304" pitchFamily="18" charset="0"/>
                 <a:ea typeface="Verdana" panose="020B0604030504040204" pitchFamily="34" charset="0"/>
-                <a:cs typeface="Times New Roman"/>
+                <a:cs typeface="Times New Roman" panose="02020603050405020304" pitchFamily="18" charset="0"/>
               </a:rPr>
             </a:br>
             <a:r>
-              <a:rPr lang="en-US" sz="3600" dirty="0">
+              <a:rPr lang="en-US" sz="3600" b="1" dirty="0">
                 <a:solidFill>
                   <a:schemeClr val="bg1"/>
                 </a:solidFill>
-                <a:latin typeface="Verdana" panose="020B0604030504040204" pitchFamily="34" charset="0"/>
+                <a:latin typeface="Times New Roman" panose="02020603050405020304" pitchFamily="18" charset="0"/>
                 <a:ea typeface="Verdana" panose="020B0604030504040204" pitchFamily="34" charset="0"/>
-                <a:cs typeface="Times New Roman"/>
+                <a:cs typeface="Times New Roman" panose="02020603050405020304" pitchFamily="18" charset="0"/>
               </a:rPr>
               <a:t>“</a:t>
             </a:r>
@@ -3836,22 +3855,58 @@
                 <a:solidFill>
                   <a:schemeClr val="bg1"/>
                 </a:solidFill>
-                <a:latin typeface="Verdana" panose="020B0604030504040204" pitchFamily="34" charset="0"/>
+                <a:latin typeface="Times New Roman" panose="02020603050405020304" pitchFamily="18" charset="0"/>
                 <a:ea typeface="Verdana" panose="020B0604030504040204" pitchFamily="34" charset="0"/>
-              </a:rPr>
-              <a:t>Разработка программного модуля для учёта товаров</a:t>
-            </a:r>
-            <a:r>
-              <a:rPr lang="en-US" sz="3600" b="1" dirty="0">
+                <a:cs typeface="Times New Roman" panose="02020603050405020304" pitchFamily="18" charset="0"/>
+              </a:rPr>
+              <a:t>Разработка программного </a:t>
+            </a:r>
+            <a:r>
+              <a:rPr lang="ru-RU" sz="3600" b="1" dirty="0" smtClean="0">
                 <a:solidFill>
                   <a:schemeClr val="bg1"/>
                 </a:solidFill>
-                <a:latin typeface="Verdana" panose="020B0604030504040204" pitchFamily="34" charset="0"/>
+                <a:latin typeface="Times New Roman" panose="02020603050405020304" pitchFamily="18" charset="0"/>
                 <a:ea typeface="Verdana" panose="020B0604030504040204" pitchFamily="34" charset="0"/>
+                <a:cs typeface="Times New Roman" panose="02020603050405020304" pitchFamily="18" charset="0"/>
+              </a:rPr>
+              <a:t>модуля</a:t>
+            </a:r>
+            <a:r>
+              <a:rPr lang="ru-RU" sz="3600" b="1" dirty="0">
+                <a:solidFill>
+                  <a:schemeClr val="bg1"/>
+                </a:solidFill>
+                <a:latin typeface="Times New Roman" panose="02020603050405020304" pitchFamily="18" charset="0"/>
+                <a:ea typeface="Verdana" panose="020B0604030504040204" pitchFamily="34" charset="0"/>
+                <a:cs typeface="Times New Roman" panose="02020603050405020304" pitchFamily="18" charset="0"/>
+              </a:rPr>
+              <a:t> </a:t>
+            </a:r>
+            <a:r>
+              <a:rPr lang="ru-RU" sz="3600" b="1" dirty="0" smtClean="0">
+                <a:solidFill>
+                  <a:schemeClr val="bg1"/>
+                </a:solidFill>
+                <a:latin typeface="Times New Roman" panose="02020603050405020304" pitchFamily="18" charset="0"/>
+                <a:ea typeface="Verdana" panose="020B0604030504040204" pitchFamily="34" charset="0"/>
+                <a:cs typeface="Times New Roman" panose="02020603050405020304" pitchFamily="18" charset="0"/>
+              </a:rPr>
+              <a:t>по покупке снаряжения</a:t>
+            </a:r>
+            <a:r>
+              <a:rPr lang="en-US" sz="3600" b="1" dirty="0" smtClean="0">
+                <a:solidFill>
+                  <a:schemeClr val="bg1"/>
+                </a:solidFill>
+                <a:latin typeface="Times New Roman" panose="02020603050405020304" pitchFamily="18" charset="0"/>
+                <a:ea typeface="Verdana" panose="020B0604030504040204" pitchFamily="34" charset="0"/>
+                <a:cs typeface="Times New Roman" panose="02020603050405020304" pitchFamily="18" charset="0"/>
               </a:rPr>
               <a:t>”</a:t>
             </a:r>
             <a:endParaRPr lang="ru-RU" sz="3600" dirty="0">
+              <a:latin typeface="Times New Roman" panose="02020603050405020304" pitchFamily="18" charset="0"/>
               <a:cs typeface="Times New Roman" panose="02020603050405020304" pitchFamily="18" charset="0"/>
             </a:endParaRPr>
           </a:p>
@@ -3886,13 +3941,16 @@
                 <a:solidFill>
                   <a:srgbClr val="0070C0"/>
                 </a:solidFill>
-                <a:latin typeface="Verdana"/>
+                <a:latin typeface="Times New Roman" panose="02020603050405020304" pitchFamily="18" charset="0"/>
                 <a:ea typeface="Verdana"/>
-                <a:cs typeface="Times New Roman"/>
+                <a:cs typeface="Times New Roman" panose="02020603050405020304" pitchFamily="18" charset="0"/>
               </a:rPr>
               <a:t>ПРАВИТЕЛЬСТВО САНКТ-ПЕТЕРБУРГА</a:t>
             </a:r>
-            <a:endParaRPr lang="ru-RU" sz="1600" dirty="0"/>
+            <a:endParaRPr lang="ru-RU" sz="1600" dirty="0">
+              <a:latin typeface="Times New Roman" panose="02020603050405020304" pitchFamily="18" charset="0"/>
+              <a:cs typeface="Times New Roman" panose="02020603050405020304" pitchFamily="18" charset="0"/>
+            </a:endParaRPr>
           </a:p>
           <a:p>
             <a:pPr algn="ctr">
@@ -3903,13 +3961,16 @@
                 <a:solidFill>
                   <a:srgbClr val="0070C0"/>
                 </a:solidFill>
-                <a:latin typeface="Verdana"/>
+                <a:latin typeface="Times New Roman" panose="02020603050405020304" pitchFamily="18" charset="0"/>
                 <a:ea typeface="Verdana"/>
-                <a:cs typeface="Times New Roman"/>
+                <a:cs typeface="Times New Roman" panose="02020603050405020304" pitchFamily="18" charset="0"/>
               </a:rPr>
               <a:t>КОМИТЕТ ПО НАУКЕ И ВЫСШЕЙ ШКОЛЕ</a:t>
             </a:r>
-            <a:endParaRPr lang="ru-RU" sz="1600" dirty="0"/>
+            <a:endParaRPr lang="ru-RU" sz="1600" dirty="0">
+              <a:latin typeface="Times New Roman" panose="02020603050405020304" pitchFamily="18" charset="0"/>
+              <a:cs typeface="Times New Roman" panose="02020603050405020304" pitchFamily="18" charset="0"/>
+            </a:endParaRPr>
           </a:p>
           <a:p>
             <a:pPr algn="ctr">
@@ -3920,13 +3981,16 @@
                 <a:solidFill>
                   <a:srgbClr val="0070C0"/>
                 </a:solidFill>
-                <a:latin typeface="Verdana"/>
+                <a:latin typeface="Times New Roman" panose="02020603050405020304" pitchFamily="18" charset="0"/>
                 <a:ea typeface="Verdana"/>
-                <a:cs typeface="Times New Roman"/>
+                <a:cs typeface="Times New Roman" panose="02020603050405020304" pitchFamily="18" charset="0"/>
               </a:rPr>
               <a:t>Санкт-Петербургское государственное бюджетное</a:t>
             </a:r>
-            <a:endParaRPr lang="ru-RU" sz="1600" dirty="0"/>
+            <a:endParaRPr lang="ru-RU" sz="1600" dirty="0">
+              <a:latin typeface="Times New Roman" panose="02020603050405020304" pitchFamily="18" charset="0"/>
+              <a:cs typeface="Times New Roman" panose="02020603050405020304" pitchFamily="18" charset="0"/>
+            </a:endParaRPr>
           </a:p>
           <a:p>
             <a:pPr algn="ctr">
@@ -3937,13 +4001,16 @@
                 <a:solidFill>
                   <a:srgbClr val="0070C0"/>
                 </a:solidFill>
-                <a:latin typeface="Verdana"/>
+                <a:latin typeface="Times New Roman" panose="02020603050405020304" pitchFamily="18" charset="0"/>
                 <a:ea typeface="Verdana"/>
-                <a:cs typeface="Times New Roman"/>
+                <a:cs typeface="Times New Roman" panose="02020603050405020304" pitchFamily="18" charset="0"/>
               </a:rPr>
               <a:t>профессиональное образовательное учреждение</a:t>
             </a:r>
-            <a:endParaRPr lang="ru-RU" sz="1600" dirty="0"/>
+            <a:endParaRPr lang="ru-RU" sz="1600" dirty="0">
+              <a:latin typeface="Times New Roman" panose="02020603050405020304" pitchFamily="18" charset="0"/>
+              <a:cs typeface="Times New Roman" panose="02020603050405020304" pitchFamily="18" charset="0"/>
+            </a:endParaRPr>
           </a:p>
           <a:p>
             <a:pPr algn="ctr">
@@ -3954,13 +4021,16 @@
                 <a:solidFill>
                   <a:srgbClr val="0070C0"/>
                 </a:solidFill>
-                <a:latin typeface="Verdana"/>
+                <a:latin typeface="Times New Roman" panose="02020603050405020304" pitchFamily="18" charset="0"/>
                 <a:ea typeface="Verdana"/>
-                <a:cs typeface="Times New Roman"/>
+                <a:cs typeface="Times New Roman" panose="02020603050405020304" pitchFamily="18" charset="0"/>
               </a:rPr>
               <a:t>«ПЕТРОВСКИЙ КОЛЛЕДЖ»</a:t>
             </a:r>
-            <a:endParaRPr lang="ru-RU" sz="1600" dirty="0"/>
+            <a:endParaRPr lang="ru-RU" sz="1600" dirty="0">
+              <a:latin typeface="Times New Roman" panose="02020603050405020304" pitchFamily="18" charset="0"/>
+              <a:cs typeface="Times New Roman" panose="02020603050405020304" pitchFamily="18" charset="0"/>
+            </a:endParaRPr>
           </a:p>
           <a:p>
             <a:pPr algn="ctr">
@@ -3971,13 +4041,16 @@
                 <a:solidFill>
                   <a:srgbClr val="0070C0"/>
                 </a:solidFill>
-                <a:latin typeface="Verdana"/>
+                <a:latin typeface="Times New Roman" panose="02020603050405020304" pitchFamily="18" charset="0"/>
                 <a:ea typeface="Verdana"/>
-                <a:cs typeface="Times New Roman"/>
+                <a:cs typeface="Times New Roman" panose="02020603050405020304" pitchFamily="18" charset="0"/>
               </a:rPr>
               <a:t>(СПб ГБПОУ «Петровский колледж»)</a:t>
             </a:r>
-            <a:endParaRPr lang="ru-RU" sz="1600" dirty="0"/>
+            <a:endParaRPr lang="ru-RU" sz="1600" dirty="0">
+              <a:latin typeface="Times New Roman" panose="02020603050405020304" pitchFamily="18" charset="0"/>
+              <a:cs typeface="Times New Roman" panose="02020603050405020304" pitchFamily="18" charset="0"/>
+            </a:endParaRPr>
           </a:p>
           <a:p>
             <a:pPr algn="ctr">
@@ -3988,13 +4061,16 @@
                 <a:solidFill>
                   <a:srgbClr val="0070C0"/>
                 </a:solidFill>
-                <a:latin typeface="Verdana"/>
+                <a:latin typeface="Times New Roman" panose="02020603050405020304" pitchFamily="18" charset="0"/>
                 <a:ea typeface="Verdana"/>
-                <a:cs typeface="Times New Roman"/>
+                <a:cs typeface="Times New Roman" panose="02020603050405020304" pitchFamily="18" charset="0"/>
               </a:rPr>
               <a:t>Отделение информационных технологий</a:t>
             </a:r>
-            <a:endParaRPr lang="ru-RU" sz="1600" dirty="0"/>
+            <a:endParaRPr lang="ru-RU" sz="1600" dirty="0">
+              <a:latin typeface="Times New Roman" panose="02020603050405020304" pitchFamily="18" charset="0"/>
+              <a:cs typeface="Times New Roman" panose="02020603050405020304" pitchFamily="18" charset="0"/>
+            </a:endParaRPr>
           </a:p>
         </p:txBody>
       </p:sp>
@@ -4007,7 +4083,7 @@
         <p:spPr>
           <a:xfrm>
             <a:off x="6623303" y="5941354"/>
-            <a:ext cx="4816768" cy="461665"/>
+            <a:ext cx="4381071" cy="461665"/>
           </a:xfrm>
           <a:prstGeom prst="rect">
             <a:avLst/>
@@ -4027,7 +4103,9 @@
                 <a:solidFill>
                   <a:schemeClr val="bg1"/>
                 </a:solidFill>
+                <a:latin typeface="Times New Roman" panose="02020603050405020304" pitchFamily="18" charset="0"/>
                 <a:ea typeface="Verdana"/>
+                <a:cs typeface="Times New Roman" panose="02020603050405020304" pitchFamily="18" charset="0"/>
               </a:rPr>
               <a:t>Руководитель: </a:t>
             </a:r>
@@ -4036,12 +4114,16 @@
                 <a:solidFill>
                   <a:schemeClr val="bg1"/>
                 </a:solidFill>
-                <a:latin typeface="Verdana" panose="020B0604030504040204" pitchFamily="34" charset="0"/>
+                <a:latin typeface="Times New Roman" panose="02020603050405020304" pitchFamily="18" charset="0"/>
                 <a:ea typeface="Verdana" panose="020B0604030504040204" pitchFamily="34" charset="0"/>
+                <a:cs typeface="Times New Roman" panose="02020603050405020304" pitchFamily="18" charset="0"/>
               </a:rPr>
               <a:t>Т.С. Спиридонова</a:t>
             </a:r>
-            <a:endParaRPr lang="ru-RU" sz="2400" b="1" dirty="0"/>
+            <a:endParaRPr lang="ru-RU" sz="2400" b="1" dirty="0">
+              <a:latin typeface="Times New Roman" panose="02020603050405020304" pitchFamily="18" charset="0"/>
+              <a:cs typeface="Times New Roman" panose="02020603050405020304" pitchFamily="18" charset="0"/>
+            </a:endParaRPr>
           </a:p>
         </p:txBody>
       </p:sp>
@@ -4077,7 +4159,13 @@
       </p:grpSpPr>
       <p:sp>
         <p:nvSpPr>
-          <p:cNvPr id="2" name="Заголовок 1"/>
+          <p:cNvPr id="2" name="Заголовок 1">
+            <a:extLst>
+              <a:ext uri="{FF2B5EF4-FFF2-40B4-BE49-F238E27FC236}">
+                <a16:creationId xmlns:a16="http://schemas.microsoft.com/office/drawing/2014/main" id="{D337215C-FF62-B8D1-8CE3-ECA54CA2011B}"/>
+              </a:ext>
+            </a:extLst>
+          </p:cNvPr>
           <p:cNvSpPr>
             <a:spLocks noGrp="1"/>
           </p:cNvSpPr>
@@ -4087,62 +4175,68 @@
         </p:nvSpPr>
         <p:spPr>
           <a:xfrm>
-            <a:off x="838200" y="-268769"/>
+            <a:off x="814887" y="-252413"/>
             <a:ext cx="10515600" cy="1325563"/>
           </a:xfrm>
         </p:spPr>
         <p:txBody>
-          <a:bodyPr>
-            <a:normAutofit/>
-          </a:bodyPr>
-          <a:lstStyle/>
-          <a:p>
-            <a:r>
-              <a:rPr lang="ru-RU" sz="5400" dirty="0">
+          <a:bodyPr/>
+          <a:lstStyle/>
+          <a:p>
+            <a:r>
+              <a:rPr lang="ru-RU" dirty="0">
                 <a:solidFill>
                   <a:schemeClr val="bg1"/>
                 </a:solidFill>
-              </a:rPr>
-              <a:t>Заключение</a:t>
-            </a:r>
-          </a:p>
-        </p:txBody>
-      </p:sp>
-      <p:sp>
-        <p:nvSpPr>
-          <p:cNvPr id="3" name="Объект 2"/>
-          <p:cNvSpPr>
-            <a:spLocks noGrp="1"/>
-          </p:cNvSpPr>
+                <a:latin typeface="Times New Roman" panose="02020603050405020304" pitchFamily="18" charset="0"/>
+                <a:cs typeface="Times New Roman" panose="02020603050405020304" pitchFamily="18" charset="0"/>
+              </a:rPr>
+              <a:t>Программа</a:t>
+            </a:r>
+          </a:p>
+        </p:txBody>
+      </p:sp>
+      <p:pic>
+        <p:nvPicPr>
+          <p:cNvPr id="6" name="Объект 5">
+            <a:extLst>
+              <a:ext uri="{FF2B5EF4-FFF2-40B4-BE49-F238E27FC236}">
+                <a16:creationId xmlns:a16="http://schemas.microsoft.com/office/drawing/2014/main" id="{91BB9CE8-0729-E97F-38D9-DECCD6724E00}"/>
+              </a:ext>
+            </a:extLst>
+          </p:cNvPr>
+          <p:cNvPicPr>
+            <a:picLocks noGrp="1" noChangeAspect="1"/>
+          </p:cNvPicPr>
           <p:nvPr>
             <p:ph idx="1"/>
           </p:nvPr>
-        </p:nvSpPr>
+        </p:nvPicPr>
+        <p:blipFill>
+          <a:blip r:embed="rId2"/>
+          <a:stretch>
+            <a:fillRect/>
+          </a:stretch>
+        </p:blipFill>
         <p:spPr>
           <a:xfrm>
-            <a:off x="910316" y="1391044"/>
-            <a:ext cx="10515600" cy="4351338"/>
+            <a:off x="1809212" y="907920"/>
+            <a:ext cx="8272950" cy="5584955"/>
           </a:xfrm>
+          <a:prstGeom prst="rect">
+            <a:avLst/>
+          </a:prstGeom>
         </p:spPr>
-        <p:txBody>
-          <a:bodyPr>
-            <a:normAutofit/>
-          </a:bodyPr>
-          <a:lstStyle/>
-          <a:p>
-            <a:pPr marL="0" indent="0">
-              <a:buNone/>
-            </a:pPr>
-            <a:r>
-              <a:rPr lang="ru-RU" sz="4400" dirty="0"/>
-              <a:t>В ходе разработал программное решение, все поставленные задачи были выполнены.</a:t>
-            </a:r>
-          </a:p>
-        </p:txBody>
-      </p:sp>
-      <p:sp>
-        <p:nvSpPr>
-          <p:cNvPr id="4" name="Номер слайда 3"/>
+      </p:pic>
+      <p:sp>
+        <p:nvSpPr>
+          <p:cNvPr id="4" name="Номер слайда 3">
+            <a:extLst>
+              <a:ext uri="{FF2B5EF4-FFF2-40B4-BE49-F238E27FC236}">
+                <a16:creationId xmlns:a16="http://schemas.microsoft.com/office/drawing/2014/main" id="{7A7DE575-49FD-6909-D52D-757774815436}"/>
+              </a:ext>
+            </a:extLst>
+          </p:cNvPr>
           <p:cNvSpPr>
             <a:spLocks noGrp="1"/>
           </p:cNvSpPr>
@@ -4152,7 +4246,7 @@
         </p:nvSpPr>
         <p:spPr>
           <a:xfrm>
-            <a:off x="8872602" y="6492875"/>
+            <a:off x="9448800" y="6492875"/>
             <a:ext cx="2743200" cy="365125"/>
           </a:xfrm>
         </p:spPr>
@@ -4165,6 +4259,8 @@
                 <a:solidFill>
                   <a:schemeClr val="bg1"/>
                 </a:solidFill>
+                <a:latin typeface="Times New Roman" panose="02020603050405020304" pitchFamily="18" charset="0"/>
+                <a:cs typeface="Times New Roman" panose="02020603050405020304" pitchFamily="18" charset="0"/>
               </a:rPr>
               <a:pPr/>
               <a:t>10</a:t>
@@ -4173,6 +4269,328 @@
               <a:solidFill>
                 <a:schemeClr val="bg1"/>
               </a:solidFill>
+              <a:latin typeface="Times New Roman" panose="02020603050405020304" pitchFamily="18" charset="0"/>
+              <a:cs typeface="Times New Roman" panose="02020603050405020304" pitchFamily="18" charset="0"/>
+            </a:endParaRPr>
+          </a:p>
+        </p:txBody>
+      </p:sp>
+    </p:spTree>
+    <p:extLst>
+      <p:ext uri="{BB962C8B-B14F-4D97-AF65-F5344CB8AC3E}">
+        <p14:creationId xmlns:p14="http://schemas.microsoft.com/office/powerpoint/2010/main" val="4192974642"/>
+      </p:ext>
+    </p:extLst>
+  </p:cSld>
+  <p:clrMapOvr>
+    <a:masterClrMapping/>
+  </p:clrMapOvr>
+</p:sld>
+</file>
+
+<file path=ppt/slides/slide11.xml><?xml version="1.0" encoding="utf-8"?>
+<p:sld xmlns:a="http://schemas.openxmlformats.org/drawingml/2006/main" xmlns:r="http://schemas.openxmlformats.org/officeDocument/2006/relationships" xmlns:p="http://schemas.openxmlformats.org/presentationml/2006/main">
+  <p:cSld>
+    <p:spTree>
+      <p:nvGrpSpPr>
+        <p:cNvPr id="1" name=""/>
+        <p:cNvGrpSpPr/>
+        <p:nvPr/>
+      </p:nvGrpSpPr>
+      <p:grpSpPr>
+        <a:xfrm>
+          <a:off x="0" y="0"/>
+          <a:ext cx="0" cy="0"/>
+          <a:chOff x="0" y="0"/>
+          <a:chExt cx="0" cy="0"/>
+        </a:xfrm>
+      </p:grpSpPr>
+      <p:sp>
+        <p:nvSpPr>
+          <p:cNvPr id="2" name="Заголовок 1">
+            <a:extLst>
+              <a:ext uri="{FF2B5EF4-FFF2-40B4-BE49-F238E27FC236}">
+                <a16:creationId xmlns:a16="http://schemas.microsoft.com/office/drawing/2014/main" id="{4AB3EC72-CF89-4086-3AC4-C57602E596AD}"/>
+              </a:ext>
+            </a:extLst>
+          </p:cNvPr>
+          <p:cNvSpPr>
+            <a:spLocks noGrp="1"/>
+          </p:cNvSpPr>
+          <p:nvPr>
+            <p:ph type="title"/>
+          </p:nvPr>
+        </p:nvSpPr>
+        <p:spPr>
+          <a:xfrm>
+            <a:off x="800099" y="-297657"/>
+            <a:ext cx="10447229" cy="1325563"/>
+          </a:xfrm>
+        </p:spPr>
+        <p:txBody>
+          <a:bodyPr/>
+          <a:lstStyle/>
+          <a:p>
+            <a:r>
+              <a:rPr lang="ru-RU" dirty="0">
+                <a:solidFill>
+                  <a:schemeClr val="bg1"/>
+                </a:solidFill>
+                <a:latin typeface="Times New Roman" panose="02020603050405020304" pitchFamily="18" charset="0"/>
+                <a:cs typeface="Times New Roman" panose="02020603050405020304" pitchFamily="18" charset="0"/>
+              </a:rPr>
+              <a:t>Программа</a:t>
+            </a:r>
+          </a:p>
+        </p:txBody>
+      </p:sp>
+      <p:pic>
+        <p:nvPicPr>
+          <p:cNvPr id="6" name="Объект 5">
+            <a:extLst>
+              <a:ext uri="{FF2B5EF4-FFF2-40B4-BE49-F238E27FC236}">
+                <a16:creationId xmlns:a16="http://schemas.microsoft.com/office/drawing/2014/main" id="{D8F3A216-7209-6EE0-F562-9635AB863188}"/>
+              </a:ext>
+            </a:extLst>
+          </p:cNvPr>
+          <p:cNvPicPr>
+            <a:picLocks noGrp="1" noChangeAspect="1"/>
+          </p:cNvPicPr>
+          <p:nvPr>
+            <p:ph idx="1"/>
+          </p:nvPr>
+        </p:nvPicPr>
+        <p:blipFill>
+          <a:blip r:embed="rId2"/>
+          <a:stretch>
+            <a:fillRect/>
+          </a:stretch>
+        </p:blipFill>
+        <p:spPr>
+          <a:xfrm>
+            <a:off x="296869" y="1071562"/>
+            <a:ext cx="5850569" cy="5603875"/>
+          </a:xfrm>
+          <a:prstGeom prst="rect">
+            <a:avLst/>
+          </a:prstGeom>
+        </p:spPr>
+      </p:pic>
+      <p:sp>
+        <p:nvSpPr>
+          <p:cNvPr id="4" name="Номер слайда 3">
+            <a:extLst>
+              <a:ext uri="{FF2B5EF4-FFF2-40B4-BE49-F238E27FC236}">
+                <a16:creationId xmlns:a16="http://schemas.microsoft.com/office/drawing/2014/main" id="{80BEBF48-5AAF-C16F-9167-F3586BBE4F69}"/>
+              </a:ext>
+            </a:extLst>
+          </p:cNvPr>
+          <p:cNvSpPr>
+            <a:spLocks noGrp="1"/>
+          </p:cNvSpPr>
+          <p:nvPr>
+            <p:ph type="sldNum" sz="quarter" idx="12"/>
+          </p:nvPr>
+        </p:nvSpPr>
+        <p:spPr>
+          <a:xfrm>
+            <a:off x="9466636" y="6492875"/>
+            <a:ext cx="2725364" cy="365125"/>
+          </a:xfrm>
+        </p:spPr>
+        <p:txBody>
+          <a:bodyPr/>
+          <a:lstStyle/>
+          <a:p>
+            <a:fld id="{D57F1E4F-1CFF-5643-939E-217C01CDF565}" type="slidenum">
+              <a:rPr lang="en-US" sz="1600" smtClean="0">
+                <a:solidFill>
+                  <a:schemeClr val="bg1"/>
+                </a:solidFill>
+                <a:latin typeface="Times New Roman" panose="02020603050405020304" pitchFamily="18" charset="0"/>
+                <a:cs typeface="Times New Roman" panose="02020603050405020304" pitchFamily="18" charset="0"/>
+              </a:rPr>
+              <a:pPr/>
+              <a:t>11</a:t>
+            </a:fld>
+            <a:endParaRPr lang="en-US" sz="1600" dirty="0">
+              <a:solidFill>
+                <a:schemeClr val="bg1"/>
+              </a:solidFill>
+              <a:latin typeface="Times New Roman" panose="02020603050405020304" pitchFamily="18" charset="0"/>
+              <a:cs typeface="Times New Roman" panose="02020603050405020304" pitchFamily="18" charset="0"/>
+            </a:endParaRPr>
+          </a:p>
+        </p:txBody>
+      </p:sp>
+      <p:pic>
+        <p:nvPicPr>
+          <p:cNvPr id="5" name="Рисунок 4"/>
+          <p:cNvPicPr>
+            <a:picLocks noChangeAspect="1"/>
+          </p:cNvPicPr>
+          <p:nvPr/>
+        </p:nvPicPr>
+        <p:blipFill>
+          <a:blip r:embed="rId3"/>
+          <a:stretch>
+            <a:fillRect/>
+          </a:stretch>
+        </p:blipFill>
+        <p:spPr>
+          <a:xfrm>
+            <a:off x="6528108" y="1071561"/>
+            <a:ext cx="5274926" cy="5421313"/>
+          </a:xfrm>
+          <a:prstGeom prst="rect">
+            <a:avLst/>
+          </a:prstGeom>
+        </p:spPr>
+      </p:pic>
+    </p:spTree>
+    <p:extLst>
+      <p:ext uri="{BB962C8B-B14F-4D97-AF65-F5344CB8AC3E}">
+        <p14:creationId xmlns:p14="http://schemas.microsoft.com/office/powerpoint/2010/main" val="143751796"/>
+      </p:ext>
+    </p:extLst>
+  </p:cSld>
+  <p:clrMapOvr>
+    <a:masterClrMapping/>
+  </p:clrMapOvr>
+</p:sld>
+</file>
+
+<file path=ppt/slides/slide12.xml><?xml version="1.0" encoding="utf-8"?>
+<p:sld xmlns:a="http://schemas.openxmlformats.org/drawingml/2006/main" xmlns:r="http://schemas.openxmlformats.org/officeDocument/2006/relationships" xmlns:p="http://schemas.openxmlformats.org/presentationml/2006/main">
+  <p:cSld>
+    <p:spTree>
+      <p:nvGrpSpPr>
+        <p:cNvPr id="1" name=""/>
+        <p:cNvGrpSpPr/>
+        <p:nvPr/>
+      </p:nvGrpSpPr>
+      <p:grpSpPr>
+        <a:xfrm>
+          <a:off x="0" y="0"/>
+          <a:ext cx="0" cy="0"/>
+          <a:chOff x="0" y="0"/>
+          <a:chExt cx="0" cy="0"/>
+        </a:xfrm>
+      </p:grpSpPr>
+      <p:sp>
+        <p:nvSpPr>
+          <p:cNvPr id="2" name="Заголовок 1"/>
+          <p:cNvSpPr>
+            <a:spLocks noGrp="1"/>
+          </p:cNvSpPr>
+          <p:nvPr>
+            <p:ph type="title"/>
+          </p:nvPr>
+        </p:nvSpPr>
+        <p:spPr>
+          <a:xfrm>
+            <a:off x="838200" y="-268769"/>
+            <a:ext cx="10515600" cy="1325563"/>
+          </a:xfrm>
+        </p:spPr>
+        <p:txBody>
+          <a:bodyPr>
+            <a:normAutofit/>
+          </a:bodyPr>
+          <a:lstStyle/>
+          <a:p>
+            <a:r>
+              <a:rPr lang="ru-RU" sz="4800" dirty="0">
+                <a:solidFill>
+                  <a:schemeClr val="bg1"/>
+                </a:solidFill>
+                <a:latin typeface="Times New Roman" panose="02020603050405020304" pitchFamily="18" charset="0"/>
+                <a:cs typeface="Times New Roman" panose="02020603050405020304" pitchFamily="18" charset="0"/>
+              </a:rPr>
+              <a:t>Заключение</a:t>
+            </a:r>
+            <a:endParaRPr lang="ru-RU" sz="5400" dirty="0">
+              <a:solidFill>
+                <a:schemeClr val="bg1"/>
+              </a:solidFill>
+              <a:latin typeface="Times New Roman" panose="02020603050405020304" pitchFamily="18" charset="0"/>
+              <a:cs typeface="Times New Roman" panose="02020603050405020304" pitchFamily="18" charset="0"/>
+            </a:endParaRPr>
+          </a:p>
+        </p:txBody>
+      </p:sp>
+      <p:sp>
+        <p:nvSpPr>
+          <p:cNvPr id="3" name="Объект 2"/>
+          <p:cNvSpPr>
+            <a:spLocks noGrp="1"/>
+          </p:cNvSpPr>
+          <p:nvPr>
+            <p:ph idx="1"/>
+          </p:nvPr>
+        </p:nvSpPr>
+        <p:spPr>
+          <a:xfrm>
+            <a:off x="1024616" y="2506662"/>
+            <a:ext cx="10515600" cy="1925638"/>
+          </a:xfrm>
+        </p:spPr>
+        <p:txBody>
+          <a:bodyPr>
+            <a:normAutofit/>
+          </a:bodyPr>
+          <a:lstStyle/>
+          <a:p>
+            <a:pPr marL="0" indent="0" algn="ctr">
+              <a:buNone/>
+            </a:pPr>
+            <a:r>
+              <a:rPr lang="ru-RU" sz="4400" dirty="0">
+                <a:latin typeface="Times New Roman" panose="02020603050405020304" pitchFamily="18" charset="0"/>
+                <a:cs typeface="Times New Roman" panose="02020603050405020304" pitchFamily="18" charset="0"/>
+              </a:rPr>
+              <a:t>В ходе разработал программное решение, все поставленные задачи были выполнены.</a:t>
+            </a:r>
+          </a:p>
+        </p:txBody>
+      </p:sp>
+      <p:sp>
+        <p:nvSpPr>
+          <p:cNvPr id="4" name="Номер слайда 3"/>
+          <p:cNvSpPr>
+            <a:spLocks noGrp="1"/>
+          </p:cNvSpPr>
+          <p:nvPr>
+            <p:ph type="sldNum" sz="quarter" idx="12"/>
+          </p:nvPr>
+        </p:nvSpPr>
+        <p:spPr>
+          <a:xfrm>
+            <a:off x="9448800" y="6492875"/>
+            <a:ext cx="2743200" cy="365125"/>
+          </a:xfrm>
+        </p:spPr>
+        <p:txBody>
+          <a:bodyPr/>
+          <a:lstStyle/>
+          <a:p>
+            <a:fld id="{D57F1E4F-1CFF-5643-939E-217C01CDF565}" type="slidenum">
+              <a:rPr lang="en-US" sz="1600" smtClean="0">
+                <a:solidFill>
+                  <a:schemeClr val="bg1"/>
+                </a:solidFill>
+                <a:latin typeface="Times New Roman" panose="02020603050405020304" pitchFamily="18" charset="0"/>
+                <a:cs typeface="Times New Roman" panose="02020603050405020304" pitchFamily="18" charset="0"/>
+              </a:rPr>
+              <a:pPr/>
+              <a:t>12</a:t>
+            </a:fld>
+            <a:endParaRPr lang="en-US" dirty="0">
+              <a:solidFill>
+                <a:schemeClr val="bg1"/>
+              </a:solidFill>
+              <a:latin typeface="Times New Roman" panose="02020603050405020304" pitchFamily="18" charset="0"/>
+              <a:cs typeface="Times New Roman" panose="02020603050405020304" pitchFamily="18" charset="0"/>
             </a:endParaRPr>
           </a:p>
         </p:txBody>
@@ -4190,7 +4608,7 @@
 </p:sld>
 </file>
 
-<file path=ppt/slides/slide11.xml><?xml version="1.0" encoding="utf-8"?>
+<file path=ppt/slides/slide13.xml><?xml version="1.0" encoding="utf-8"?>
 <p:sld xmlns:a="http://schemas.openxmlformats.org/drawingml/2006/main" xmlns:r="http://schemas.openxmlformats.org/officeDocument/2006/relationships" xmlns:p="http://schemas.openxmlformats.org/presentationml/2006/main">
   <p:cSld>
     <p:bg>
@@ -4209,13 +4627,7 @@
     </p:bg>
     <p:spTree>
       <p:nvGrpSpPr>
-        <p:cNvPr id="1" name="">
-          <a:extLst>
-            <a:ext uri="{FF2B5EF4-FFF2-40B4-BE49-F238E27FC236}">
-              <a16:creationId xmlns:a16="http://schemas.microsoft.com/office/drawing/2014/main" id="{D6AB140B-CF52-901F-CEE2-0F4F1ED5338B}"/>
-            </a:ext>
-          </a:extLst>
-        </p:cNvPr>
+        <p:cNvPr id="1" name=""/>
         <p:cNvGrpSpPr/>
         <p:nvPr/>
       </p:nvGrpSpPr>
@@ -4229,13 +4641,7 @@
       </p:grpSpPr>
       <p:sp>
         <p:nvSpPr>
-          <p:cNvPr id="3" name="Подзаголовок 2">
-            <a:extLst>
-              <a:ext uri="{FF2B5EF4-FFF2-40B4-BE49-F238E27FC236}">
-                <a16:creationId xmlns:a16="http://schemas.microsoft.com/office/drawing/2014/main" id="{DEBC42EC-E692-4158-E63A-7E0990651B00}"/>
-              </a:ext>
-            </a:extLst>
-          </p:cNvPr>
+          <p:cNvPr id="3" name="Подзаголовок 2"/>
           <p:cNvSpPr>
             <a:spLocks noGrp="1"/>
           </p:cNvSpPr>
@@ -4261,6 +4667,8 @@
                 <a:solidFill>
                   <a:schemeClr val="bg1"/>
                 </a:solidFill>
+                <a:latin typeface="Times New Roman" panose="02020603050405020304" pitchFamily="18" charset="0"/>
+                <a:cs typeface="Times New Roman" panose="02020603050405020304" pitchFamily="18" charset="0"/>
               </a:rPr>
               <a:t>Выполнил</a:t>
             </a:r>
@@ -4269,6 +4677,8 @@
                 <a:solidFill>
                   <a:schemeClr val="bg1"/>
                 </a:solidFill>
+                <a:latin typeface="Times New Roman" panose="02020603050405020304" pitchFamily="18" charset="0"/>
+                <a:cs typeface="Times New Roman" panose="02020603050405020304" pitchFamily="18" charset="0"/>
               </a:rPr>
               <a:t>: </a:t>
             </a:r>
@@ -4277,6 +4687,8 @@
                 <a:solidFill>
                   <a:schemeClr val="bg1"/>
                 </a:solidFill>
+                <a:latin typeface="Times New Roman" panose="02020603050405020304" pitchFamily="18" charset="0"/>
+                <a:cs typeface="Times New Roman" panose="02020603050405020304" pitchFamily="18" charset="0"/>
               </a:rPr>
               <a:t>Мирошниченко С. С.</a:t>
             </a:r>
@@ -4285,13 +4697,7 @@
       </p:sp>
       <p:sp>
         <p:nvSpPr>
-          <p:cNvPr id="4" name="Прямоугольник 3">
-            <a:extLst>
-              <a:ext uri="{FF2B5EF4-FFF2-40B4-BE49-F238E27FC236}">
-                <a16:creationId xmlns:a16="http://schemas.microsoft.com/office/drawing/2014/main" id="{A5F72479-640E-9FE4-A26D-25917F68902D}"/>
-              </a:ext>
-            </a:extLst>
-          </p:cNvPr>
+          <p:cNvPr id="4" name="Прямоугольник 3"/>
           <p:cNvSpPr/>
           <p:nvPr/>
         </p:nvSpPr>
@@ -4316,30 +4722,41 @@
                 <a:solidFill>
                   <a:schemeClr val="bg1"/>
                 </a:solidFill>
-                <a:latin typeface="Verdana" panose="020B0604030504040204" pitchFamily="34" charset="0"/>
+                <a:latin typeface="Times New Roman" panose="02020603050405020304" pitchFamily="18" charset="0"/>
                 <a:ea typeface="Verdana" panose="020B0604030504040204" pitchFamily="34" charset="0"/>
-                <a:cs typeface="Times New Roman"/>
+                <a:cs typeface="Times New Roman" panose="02020603050405020304" pitchFamily="18" charset="0"/>
               </a:rPr>
               <a:t>Курсовой проект по теме </a:t>
+            </a:r>
+            <a:r>
+              <a:rPr lang="en-US" sz="3600" dirty="0">
+                <a:solidFill>
+                  <a:schemeClr val="bg1"/>
+                </a:solidFill>
+                <a:latin typeface="Times New Roman" panose="02020603050405020304" pitchFamily="18" charset="0"/>
+                <a:ea typeface="Verdana" panose="020B0604030504040204" pitchFamily="34" charset="0"/>
+                <a:cs typeface="Times New Roman" panose="02020603050405020304" pitchFamily="18" charset="0"/>
+              </a:rPr>
+              <a:t/>
             </a:r>
             <a:br>
               <a:rPr lang="en-US" sz="3600" dirty="0">
                 <a:solidFill>
                   <a:schemeClr val="bg1"/>
                 </a:solidFill>
-                <a:latin typeface="Verdana" panose="020B0604030504040204" pitchFamily="34" charset="0"/>
+                <a:latin typeface="Times New Roman" panose="02020603050405020304" pitchFamily="18" charset="0"/>
                 <a:ea typeface="Verdana" panose="020B0604030504040204" pitchFamily="34" charset="0"/>
-                <a:cs typeface="Times New Roman"/>
+                <a:cs typeface="Times New Roman" panose="02020603050405020304" pitchFamily="18" charset="0"/>
               </a:rPr>
             </a:br>
             <a:r>
-              <a:rPr lang="en-US" sz="3600" dirty="0">
+              <a:rPr lang="en-US" sz="3600" b="1" dirty="0">
                 <a:solidFill>
                   <a:schemeClr val="bg1"/>
                 </a:solidFill>
-                <a:latin typeface="Verdana" panose="020B0604030504040204" pitchFamily="34" charset="0"/>
+                <a:latin typeface="Times New Roman" panose="02020603050405020304" pitchFamily="18" charset="0"/>
                 <a:ea typeface="Verdana" panose="020B0604030504040204" pitchFamily="34" charset="0"/>
-                <a:cs typeface="Times New Roman"/>
+                <a:cs typeface="Times New Roman" panose="02020603050405020304" pitchFamily="18" charset="0"/>
               </a:rPr>
               <a:t>“</a:t>
             </a:r>
@@ -4348,22 +4765,58 @@
                 <a:solidFill>
                   <a:schemeClr val="bg1"/>
                 </a:solidFill>
-                <a:latin typeface="Verdana" panose="020B0604030504040204" pitchFamily="34" charset="0"/>
+                <a:latin typeface="Times New Roman" panose="02020603050405020304" pitchFamily="18" charset="0"/>
                 <a:ea typeface="Verdana" panose="020B0604030504040204" pitchFamily="34" charset="0"/>
-              </a:rPr>
-              <a:t>Разработка программного модуля для учёта товаров</a:t>
-            </a:r>
-            <a:r>
-              <a:rPr lang="en-US" sz="3600" b="1" dirty="0">
+                <a:cs typeface="Times New Roman" panose="02020603050405020304" pitchFamily="18" charset="0"/>
+              </a:rPr>
+              <a:t>Разработка программного </a:t>
+            </a:r>
+            <a:r>
+              <a:rPr lang="ru-RU" sz="3600" b="1" dirty="0" smtClean="0">
                 <a:solidFill>
                   <a:schemeClr val="bg1"/>
                 </a:solidFill>
-                <a:latin typeface="Verdana" panose="020B0604030504040204" pitchFamily="34" charset="0"/>
+                <a:latin typeface="Times New Roman" panose="02020603050405020304" pitchFamily="18" charset="0"/>
                 <a:ea typeface="Verdana" panose="020B0604030504040204" pitchFamily="34" charset="0"/>
+                <a:cs typeface="Times New Roman" panose="02020603050405020304" pitchFamily="18" charset="0"/>
+              </a:rPr>
+              <a:t>модуля</a:t>
+            </a:r>
+            <a:r>
+              <a:rPr lang="ru-RU" sz="3600" b="1" dirty="0">
+                <a:solidFill>
+                  <a:schemeClr val="bg1"/>
+                </a:solidFill>
+                <a:latin typeface="Times New Roman" panose="02020603050405020304" pitchFamily="18" charset="0"/>
+                <a:ea typeface="Verdana" panose="020B0604030504040204" pitchFamily="34" charset="0"/>
+                <a:cs typeface="Times New Roman" panose="02020603050405020304" pitchFamily="18" charset="0"/>
+              </a:rPr>
+              <a:t> </a:t>
+            </a:r>
+            <a:r>
+              <a:rPr lang="ru-RU" sz="3600" b="1" dirty="0" smtClean="0">
+                <a:solidFill>
+                  <a:schemeClr val="bg1"/>
+                </a:solidFill>
+                <a:latin typeface="Times New Roman" panose="02020603050405020304" pitchFamily="18" charset="0"/>
+                <a:ea typeface="Verdana" panose="020B0604030504040204" pitchFamily="34" charset="0"/>
+                <a:cs typeface="Times New Roman" panose="02020603050405020304" pitchFamily="18" charset="0"/>
+              </a:rPr>
+              <a:t>по покупке снаряжения</a:t>
+            </a:r>
+            <a:r>
+              <a:rPr lang="en-US" sz="3600" b="1" dirty="0" smtClean="0">
+                <a:solidFill>
+                  <a:schemeClr val="bg1"/>
+                </a:solidFill>
+                <a:latin typeface="Times New Roman" panose="02020603050405020304" pitchFamily="18" charset="0"/>
+                <a:ea typeface="Verdana" panose="020B0604030504040204" pitchFamily="34" charset="0"/>
+                <a:cs typeface="Times New Roman" panose="02020603050405020304" pitchFamily="18" charset="0"/>
               </a:rPr>
               <a:t>”</a:t>
             </a:r>
             <a:endParaRPr lang="ru-RU" sz="3600" dirty="0">
+              <a:latin typeface="Times New Roman" panose="02020603050405020304" pitchFamily="18" charset="0"/>
               <a:cs typeface="Times New Roman" panose="02020603050405020304" pitchFamily="18" charset="0"/>
             </a:endParaRPr>
           </a:p>
@@ -4371,13 +4824,7 @@
       </p:sp>
       <p:sp>
         <p:nvSpPr>
-          <p:cNvPr id="6" name="Прямоугольник 5">
-            <a:extLst>
-              <a:ext uri="{FF2B5EF4-FFF2-40B4-BE49-F238E27FC236}">
-                <a16:creationId xmlns:a16="http://schemas.microsoft.com/office/drawing/2014/main" id="{015645D5-339F-8212-43DA-18CBC54507F1}"/>
-              </a:ext>
-            </a:extLst>
-          </p:cNvPr>
+          <p:cNvPr id="6" name="Прямоугольник 5"/>
           <p:cNvSpPr/>
           <p:nvPr/>
         </p:nvSpPr>
@@ -4404,13 +4851,16 @@
                 <a:solidFill>
                   <a:srgbClr val="0070C0"/>
                 </a:solidFill>
-                <a:latin typeface="Verdana"/>
+                <a:latin typeface="Times New Roman" panose="02020603050405020304" pitchFamily="18" charset="0"/>
                 <a:ea typeface="Verdana"/>
-                <a:cs typeface="Times New Roman"/>
+                <a:cs typeface="Times New Roman" panose="02020603050405020304" pitchFamily="18" charset="0"/>
               </a:rPr>
               <a:t>ПРАВИТЕЛЬСТВО САНКТ-ПЕТЕРБУРГА</a:t>
             </a:r>
-            <a:endParaRPr lang="ru-RU" sz="1600" dirty="0"/>
+            <a:endParaRPr lang="ru-RU" sz="1600" dirty="0">
+              <a:latin typeface="Times New Roman" panose="02020603050405020304" pitchFamily="18" charset="0"/>
+              <a:cs typeface="Times New Roman" panose="02020603050405020304" pitchFamily="18" charset="0"/>
+            </a:endParaRPr>
           </a:p>
           <a:p>
             <a:pPr algn="ctr">
@@ -4421,13 +4871,16 @@
                 <a:solidFill>
                   <a:srgbClr val="0070C0"/>
                 </a:solidFill>
-                <a:latin typeface="Verdana"/>
+                <a:latin typeface="Times New Roman" panose="02020603050405020304" pitchFamily="18" charset="0"/>
                 <a:ea typeface="Verdana"/>
-                <a:cs typeface="Times New Roman"/>
+                <a:cs typeface="Times New Roman" panose="02020603050405020304" pitchFamily="18" charset="0"/>
               </a:rPr>
               <a:t>КОМИТЕТ ПО НАУКЕ И ВЫСШЕЙ ШКОЛЕ</a:t>
             </a:r>
-            <a:endParaRPr lang="ru-RU" sz="1600" dirty="0"/>
+            <a:endParaRPr lang="ru-RU" sz="1600" dirty="0">
+              <a:latin typeface="Times New Roman" panose="02020603050405020304" pitchFamily="18" charset="0"/>
+              <a:cs typeface="Times New Roman" panose="02020603050405020304" pitchFamily="18" charset="0"/>
+            </a:endParaRPr>
           </a:p>
           <a:p>
             <a:pPr algn="ctr">
@@ -4438,13 +4891,16 @@
                 <a:solidFill>
                   <a:srgbClr val="0070C0"/>
                 </a:solidFill>
-                <a:latin typeface="Verdana"/>
+                <a:latin typeface="Times New Roman" panose="02020603050405020304" pitchFamily="18" charset="0"/>
                 <a:ea typeface="Verdana"/>
-                <a:cs typeface="Times New Roman"/>
+                <a:cs typeface="Times New Roman" panose="02020603050405020304" pitchFamily="18" charset="0"/>
               </a:rPr>
               <a:t>Санкт-Петербургское государственное бюджетное</a:t>
             </a:r>
-            <a:endParaRPr lang="ru-RU" sz="1600" dirty="0"/>
+            <a:endParaRPr lang="ru-RU" sz="1600" dirty="0">
+              <a:latin typeface="Times New Roman" panose="02020603050405020304" pitchFamily="18" charset="0"/>
+              <a:cs typeface="Times New Roman" panose="02020603050405020304" pitchFamily="18" charset="0"/>
+            </a:endParaRPr>
           </a:p>
           <a:p>
             <a:pPr algn="ctr">
@@ -4455,13 +4911,16 @@
                 <a:solidFill>
                   <a:srgbClr val="0070C0"/>
                 </a:solidFill>
-                <a:latin typeface="Verdana"/>
+                <a:latin typeface="Times New Roman" panose="02020603050405020304" pitchFamily="18" charset="0"/>
                 <a:ea typeface="Verdana"/>
-                <a:cs typeface="Times New Roman"/>
+                <a:cs typeface="Times New Roman" panose="02020603050405020304" pitchFamily="18" charset="0"/>
               </a:rPr>
               <a:t>профессиональное образовательное учреждение</a:t>
             </a:r>
-            <a:endParaRPr lang="ru-RU" sz="1600" dirty="0"/>
+            <a:endParaRPr lang="ru-RU" sz="1600" dirty="0">
+              <a:latin typeface="Times New Roman" panose="02020603050405020304" pitchFamily="18" charset="0"/>
+              <a:cs typeface="Times New Roman" panose="02020603050405020304" pitchFamily="18" charset="0"/>
+            </a:endParaRPr>
           </a:p>
           <a:p>
             <a:pPr algn="ctr">
@@ -4472,13 +4931,16 @@
                 <a:solidFill>
                   <a:srgbClr val="0070C0"/>
                 </a:solidFill>
-                <a:latin typeface="Verdana"/>
+                <a:latin typeface="Times New Roman" panose="02020603050405020304" pitchFamily="18" charset="0"/>
                 <a:ea typeface="Verdana"/>
-                <a:cs typeface="Times New Roman"/>
+                <a:cs typeface="Times New Roman" panose="02020603050405020304" pitchFamily="18" charset="0"/>
               </a:rPr>
               <a:t>«ПЕТРОВСКИЙ КОЛЛЕДЖ»</a:t>
             </a:r>
-            <a:endParaRPr lang="ru-RU" sz="1600" dirty="0"/>
+            <a:endParaRPr lang="ru-RU" sz="1600" dirty="0">
+              <a:latin typeface="Times New Roman" panose="02020603050405020304" pitchFamily="18" charset="0"/>
+              <a:cs typeface="Times New Roman" panose="02020603050405020304" pitchFamily="18" charset="0"/>
+            </a:endParaRPr>
           </a:p>
           <a:p>
             <a:pPr algn="ctr">
@@ -4489,13 +4951,16 @@
                 <a:solidFill>
                   <a:srgbClr val="0070C0"/>
                 </a:solidFill>
-                <a:latin typeface="Verdana"/>
+                <a:latin typeface="Times New Roman" panose="02020603050405020304" pitchFamily="18" charset="0"/>
                 <a:ea typeface="Verdana"/>
-                <a:cs typeface="Times New Roman"/>
+                <a:cs typeface="Times New Roman" panose="02020603050405020304" pitchFamily="18" charset="0"/>
               </a:rPr>
               <a:t>(СПб ГБПОУ «Петровский колледж»)</a:t>
             </a:r>
-            <a:endParaRPr lang="ru-RU" sz="1600" dirty="0"/>
+            <a:endParaRPr lang="ru-RU" sz="1600" dirty="0">
+              <a:latin typeface="Times New Roman" panose="02020603050405020304" pitchFamily="18" charset="0"/>
+              <a:cs typeface="Times New Roman" panose="02020603050405020304" pitchFamily="18" charset="0"/>
+            </a:endParaRPr>
           </a:p>
           <a:p>
             <a:pPr algn="ctr">
@@ -4506,32 +4971,29 @@
                 <a:solidFill>
                   <a:srgbClr val="0070C0"/>
                 </a:solidFill>
-                <a:latin typeface="Verdana"/>
+                <a:latin typeface="Times New Roman" panose="02020603050405020304" pitchFamily="18" charset="0"/>
                 <a:ea typeface="Verdana"/>
-                <a:cs typeface="Times New Roman"/>
+                <a:cs typeface="Times New Roman" panose="02020603050405020304" pitchFamily="18" charset="0"/>
               </a:rPr>
               <a:t>Отделение информационных технологий</a:t>
             </a:r>
-            <a:endParaRPr lang="ru-RU" sz="1600" dirty="0"/>
-          </a:p>
-        </p:txBody>
-      </p:sp>
-      <p:sp>
-        <p:nvSpPr>
-          <p:cNvPr id="7" name="Прямоугольник 6">
-            <a:extLst>
-              <a:ext uri="{FF2B5EF4-FFF2-40B4-BE49-F238E27FC236}">
-                <a16:creationId xmlns:a16="http://schemas.microsoft.com/office/drawing/2014/main" id="{2391A6E0-9809-BC5A-1685-6C24B51A66D9}"/>
-              </a:ext>
-            </a:extLst>
-          </p:cNvPr>
+            <a:endParaRPr lang="ru-RU" sz="1600" dirty="0">
+              <a:latin typeface="Times New Roman" panose="02020603050405020304" pitchFamily="18" charset="0"/>
+              <a:cs typeface="Times New Roman" panose="02020603050405020304" pitchFamily="18" charset="0"/>
+            </a:endParaRPr>
+          </a:p>
+        </p:txBody>
+      </p:sp>
+      <p:sp>
+        <p:nvSpPr>
+          <p:cNvPr id="7" name="Прямоугольник 6"/>
           <p:cNvSpPr/>
           <p:nvPr/>
         </p:nvSpPr>
         <p:spPr>
           <a:xfrm>
             <a:off x="6623303" y="5941354"/>
-            <a:ext cx="4816768" cy="461665"/>
+            <a:ext cx="4802661" cy="461665"/>
           </a:xfrm>
           <a:prstGeom prst="rect">
             <a:avLst/>
@@ -4551,28 +5013,34 @@
                 <a:solidFill>
                   <a:schemeClr val="bg1"/>
                 </a:solidFill>
+                <a:latin typeface="Times New Roman" panose="02020603050405020304" pitchFamily="18" charset="0"/>
                 <a:ea typeface="Verdana"/>
+                <a:cs typeface="Times New Roman" panose="02020603050405020304" pitchFamily="18" charset="0"/>
               </a:rPr>
               <a:t>Руководитель: </a:t>
             </a:r>
             <a:r>
-              <a:rPr lang="ru-RU" sz="2000" b="1" dirty="0">
+              <a:rPr lang="ru-RU" sz="2400" b="1" dirty="0">
                 <a:solidFill>
                   <a:schemeClr val="bg1"/>
                 </a:solidFill>
-                <a:latin typeface="Verdana" panose="020B0604030504040204" pitchFamily="34" charset="0"/>
+                <a:latin typeface="Times New Roman" panose="02020603050405020304" pitchFamily="18" charset="0"/>
                 <a:ea typeface="Verdana" panose="020B0604030504040204" pitchFamily="34" charset="0"/>
+                <a:cs typeface="Times New Roman" panose="02020603050405020304" pitchFamily="18" charset="0"/>
               </a:rPr>
               <a:t>Т.С. Спиридонова</a:t>
             </a:r>
-            <a:endParaRPr lang="ru-RU" sz="2400" b="1" dirty="0"/>
+            <a:endParaRPr lang="ru-RU" sz="2400" b="1" dirty="0">
+              <a:latin typeface="Times New Roman" panose="02020603050405020304" pitchFamily="18" charset="0"/>
+              <a:cs typeface="Times New Roman" panose="02020603050405020304" pitchFamily="18" charset="0"/>
+            </a:endParaRPr>
           </a:p>
         </p:txBody>
       </p:sp>
     </p:spTree>
     <p:extLst>
       <p:ext uri="{BB962C8B-B14F-4D97-AF65-F5344CB8AC3E}">
-        <p14:creationId xmlns:p14="http://schemas.microsoft.com/office/powerpoint/2010/main" val="2141949974"/>
+        <p14:creationId xmlns:p14="http://schemas.microsoft.com/office/powerpoint/2010/main" val="3191922818"/>
       </p:ext>
     </p:extLst>
   </p:cSld>
@@ -4611,8 +5079,8 @@
         </p:nvSpPr>
         <p:spPr>
           <a:xfrm>
-            <a:off x="-915362" y="0"/>
-            <a:ext cx="10396728" cy="1009218"/>
+            <a:off x="825500" y="0"/>
+            <a:ext cx="6176625" cy="800100"/>
           </a:xfrm>
         </p:spPr>
         <p:txBody>
@@ -4621,11 +5089,23 @@
           </a:bodyPr>
           <a:lstStyle/>
           <a:p>
-            <a:pPr algn="ctr"/>
-            <a:r>
-              <a:rPr lang="ru-RU" sz="5400" dirty="0"/>
-              <a:t>Цель и задачи практики</a:t>
-            </a:r>
+            <a:r>
+              <a:rPr lang="ru-RU" dirty="0" smtClean="0">
+                <a:solidFill>
+                  <a:schemeClr val="bg1"/>
+                </a:solidFill>
+                <a:latin typeface="Times New Roman" panose="02020603050405020304" pitchFamily="18" charset="0"/>
+                <a:cs typeface="Times New Roman" panose="02020603050405020304" pitchFamily="18" charset="0"/>
+              </a:rPr>
+              <a:t>Цель и задачи</a:t>
+            </a:r>
+            <a:endParaRPr lang="ru-RU" dirty="0">
+              <a:solidFill>
+                <a:schemeClr val="bg1"/>
+              </a:solidFill>
+              <a:latin typeface="Times New Roman" panose="02020603050405020304" pitchFamily="18" charset="0"/>
+              <a:cs typeface="Times New Roman" panose="02020603050405020304" pitchFamily="18" charset="0"/>
+            </a:endParaRPr>
           </a:p>
         </p:txBody>
       </p:sp>
@@ -4655,15 +5135,24 @@
               <a:buNone/>
             </a:pPr>
             <a:r>
-              <a:rPr lang="ru-RU" sz="3600" dirty="0"/>
+              <a:rPr lang="ru-RU" sz="3600" dirty="0">
+                <a:latin typeface="Times New Roman" panose="02020603050405020304" pitchFamily="18" charset="0"/>
+                <a:cs typeface="Times New Roman" panose="02020603050405020304" pitchFamily="18" charset="0"/>
+              </a:rPr>
               <a:t>Цель – разработать </a:t>
             </a:r>
             <a:r>
-              <a:rPr lang="en-US" sz="3600" dirty="0"/>
+              <a:rPr lang="en-US" sz="3600" dirty="0">
+                <a:latin typeface="Times New Roman" panose="02020603050405020304" pitchFamily="18" charset="0"/>
+                <a:cs typeface="Times New Roman" panose="02020603050405020304" pitchFamily="18" charset="0"/>
+              </a:rPr>
               <a:t>WPF </a:t>
             </a:r>
             <a:r>
-              <a:rPr lang="ru-RU" sz="3600" dirty="0"/>
+              <a:rPr lang="ru-RU" sz="3600" dirty="0">
+                <a:latin typeface="Times New Roman" panose="02020603050405020304" pitchFamily="18" charset="0"/>
+                <a:cs typeface="Times New Roman" panose="02020603050405020304" pitchFamily="18" charset="0"/>
+              </a:rPr>
               <a:t>приложение для автоматизации учета товаров.</a:t>
             </a:r>
           </a:p>
@@ -4672,7 +5161,10 @@
               <a:buNone/>
             </a:pPr>
             <a:r>
-              <a:rPr lang="ru-RU" sz="3600" dirty="0"/>
+              <a:rPr lang="ru-RU" sz="3600" dirty="0">
+                <a:latin typeface="Times New Roman" panose="02020603050405020304" pitchFamily="18" charset="0"/>
+                <a:cs typeface="Times New Roman" panose="02020603050405020304" pitchFamily="18" charset="0"/>
+              </a:rPr>
               <a:t>Задачи:</a:t>
             </a:r>
           </a:p>
@@ -4681,7 +5173,10 @@
               <a:buAutoNum type="arabicPeriod"/>
             </a:pPr>
             <a:r>
-              <a:rPr lang="ru-RU" sz="3600" dirty="0"/>
+              <a:rPr lang="ru-RU" sz="3600" dirty="0">
+                <a:latin typeface="Times New Roman" panose="02020603050405020304" pitchFamily="18" charset="0"/>
+                <a:cs typeface="Times New Roman" panose="02020603050405020304" pitchFamily="18" charset="0"/>
+              </a:rPr>
               <a:t>Проанализировать рынок</a:t>
             </a:r>
           </a:p>
@@ -4690,7 +5185,10 @@
               <a:buAutoNum type="arabicPeriod"/>
             </a:pPr>
             <a:r>
-              <a:rPr lang="ru-RU" sz="3600" dirty="0"/>
+              <a:rPr lang="ru-RU" sz="3600" dirty="0">
+                <a:latin typeface="Times New Roman" panose="02020603050405020304" pitchFamily="18" charset="0"/>
+                <a:cs typeface="Times New Roman" panose="02020603050405020304" pitchFamily="18" charset="0"/>
+              </a:rPr>
               <a:t>Спроектировать базу данных</a:t>
             </a:r>
           </a:p>
@@ -4699,7 +5197,10 @@
               <a:buAutoNum type="arabicPeriod"/>
             </a:pPr>
             <a:r>
-              <a:rPr lang="ru-RU" sz="3600" dirty="0"/>
+              <a:rPr lang="ru-RU" sz="3600" dirty="0">
+                <a:latin typeface="Times New Roman" panose="02020603050405020304" pitchFamily="18" charset="0"/>
+                <a:cs typeface="Times New Roman" panose="02020603050405020304" pitchFamily="18" charset="0"/>
+              </a:rPr>
               <a:t>Разработать десктоп-приложение</a:t>
             </a:r>
           </a:p>
@@ -4708,7 +5209,10 @@
               <a:buAutoNum type="arabicPeriod"/>
             </a:pPr>
             <a:r>
-              <a:rPr lang="ru-RU" sz="3600" dirty="0"/>
+              <a:rPr lang="ru-RU" sz="3600" dirty="0">
+                <a:latin typeface="Times New Roman" panose="02020603050405020304" pitchFamily="18" charset="0"/>
+                <a:cs typeface="Times New Roman" panose="02020603050405020304" pitchFamily="18" charset="0"/>
+              </a:rPr>
               <a:t>Протестировать готовое комплексное решение </a:t>
             </a:r>
           </a:p>
@@ -4739,6 +5243,8 @@
                 <a:solidFill>
                   <a:schemeClr val="bg1"/>
                 </a:solidFill>
+                <a:latin typeface="Times New Roman" panose="02020603050405020304" pitchFamily="18" charset="0"/>
+                <a:cs typeface="Times New Roman" panose="02020603050405020304" pitchFamily="18" charset="0"/>
               </a:rPr>
               <a:pPr/>
               <a:t>2</a:t>
@@ -4747,6 +5253,8 @@
               <a:solidFill>
                 <a:schemeClr val="bg1"/>
               </a:solidFill>
+              <a:latin typeface="Times New Roman" panose="02020603050405020304" pitchFamily="18" charset="0"/>
+              <a:cs typeface="Times New Roman" panose="02020603050405020304" pitchFamily="18" charset="0"/>
             </a:endParaRPr>
           </a:p>
         </p:txBody>
@@ -4793,8 +5301,8 @@
         </p:nvSpPr>
         <p:spPr>
           <a:xfrm>
-            <a:off x="437147" y="1365626"/>
-            <a:ext cx="6300537" cy="4351338"/>
+            <a:off x="546099" y="1125929"/>
+            <a:ext cx="10897217" cy="4351338"/>
           </a:xfrm>
         </p:spPr>
         <p:txBody>
@@ -4807,11 +5315,17 @@
               <a:buNone/>
             </a:pPr>
             <a:r>
-              <a:rPr lang="ru-RU" sz="3200" dirty="0"/>
+              <a:rPr lang="ru-RU" sz="3200" dirty="0">
+                <a:latin typeface="Times New Roman" panose="02020603050405020304" pitchFamily="18" charset="0"/>
+                <a:cs typeface="Times New Roman" panose="02020603050405020304" pitchFamily="18" charset="0"/>
+              </a:rPr>
               <a:t>Название системы – </a:t>
             </a:r>
             <a:r>
-              <a:rPr lang="en-US" sz="3200" dirty="0"/>
+              <a:rPr lang="en-US" sz="3200" dirty="0">
+                <a:latin typeface="Times New Roman" panose="02020603050405020304" pitchFamily="18" charset="0"/>
+                <a:cs typeface="Times New Roman" panose="02020603050405020304" pitchFamily="18" charset="0"/>
+              </a:rPr>
               <a:t>7Apex</a:t>
             </a:r>
           </a:p>
@@ -4820,7 +5334,10 @@
               <a:buNone/>
             </a:pPr>
             <a:r>
-              <a:rPr lang="ru-RU" sz="3200" dirty="0"/>
+              <a:rPr lang="ru-RU" sz="3200" dirty="0">
+                <a:latin typeface="Times New Roman" panose="02020603050405020304" pitchFamily="18" charset="0"/>
+                <a:cs typeface="Times New Roman" panose="02020603050405020304" pitchFamily="18" charset="0"/>
+              </a:rPr>
               <a:t>Основная деятельность – продажа. профессионального оборудования для походов и организация туров.</a:t>
             </a:r>
           </a:p>
@@ -4829,15 +5346,38 @@
               <a:buNone/>
             </a:pPr>
             <a:r>
-              <a:rPr lang="ru-RU" sz="3200" dirty="0"/>
+              <a:rPr lang="ru-RU" sz="3200" dirty="0">
+                <a:latin typeface="Times New Roman" panose="02020603050405020304" pitchFamily="18" charset="0"/>
+                <a:cs typeface="Times New Roman" panose="02020603050405020304" pitchFamily="18" charset="0"/>
+              </a:rPr>
               <a:t>Цель создания системы – автоматизация процессов </a:t>
             </a:r>
             <a:r>
-              <a:rPr lang="ru-RU" sz="3200" dirty="0" err="1"/>
-              <a:t>интернет-торговли</a:t>
-            </a:r>
-            <a:r>
-              <a:rPr lang="ru-RU" sz="3200" dirty="0"/>
+              <a:rPr lang="ru-RU" sz="3200" dirty="0" smtClean="0">
+                <a:latin typeface="Times New Roman" panose="02020603050405020304" pitchFamily="18" charset="0"/>
+                <a:cs typeface="Times New Roman" panose="02020603050405020304" pitchFamily="18" charset="0"/>
+              </a:rPr>
+              <a:t>интернет</a:t>
+            </a:r>
+            <a:r>
+              <a:rPr lang="en-US" sz="3200" dirty="0" smtClean="0">
+                <a:latin typeface="Times New Roman" panose="02020603050405020304" pitchFamily="18" charset="0"/>
+                <a:cs typeface="Times New Roman" panose="02020603050405020304" pitchFamily="18" charset="0"/>
+              </a:rPr>
+              <a:t>-</a:t>
+            </a:r>
+            <a:r>
+              <a:rPr lang="ru-RU" sz="3200" dirty="0" smtClean="0">
+                <a:latin typeface="Times New Roman" panose="02020603050405020304" pitchFamily="18" charset="0"/>
+                <a:cs typeface="Times New Roman" panose="02020603050405020304" pitchFamily="18" charset="0"/>
+              </a:rPr>
+              <a:t>торговли</a:t>
+            </a:r>
+            <a:r>
+              <a:rPr lang="ru-RU" sz="3200" dirty="0">
+                <a:latin typeface="Times New Roman" panose="02020603050405020304" pitchFamily="18" charset="0"/>
+                <a:cs typeface="Times New Roman" panose="02020603050405020304" pitchFamily="18" charset="0"/>
+              </a:rPr>
               <a:t>.</a:t>
             </a:r>
           </a:p>
@@ -4851,31 +5391,34 @@
         </p:nvSpPr>
         <p:spPr>
           <a:xfrm>
-            <a:off x="968804" y="180292"/>
-            <a:ext cx="4318811" cy="369332"/>
+            <a:off x="814057" y="-127000"/>
+            <a:ext cx="5396243" cy="1077218"/>
           </a:xfrm>
           <a:prstGeom prst="rect">
             <a:avLst/>
           </a:prstGeom>
         </p:spPr>
         <p:txBody>
-          <a:bodyPr wrap="none">
+          <a:bodyPr wrap="square">
             <a:spAutoFit/>
           </a:bodyPr>
           <a:lstStyle/>
           <a:p>
             <a:r>
-              <a:rPr lang="ru-RU" b="1" dirty="0">
+              <a:rPr lang="ru-RU" sz="3200" dirty="0">
                 <a:solidFill>
                   <a:schemeClr val="bg1"/>
                 </a:solidFill>
-                <a:latin typeface="Verdana"/>
+                <a:latin typeface="Times New Roman" panose="02020603050405020304" pitchFamily="18" charset="0"/>
                 <a:ea typeface="Verdana"/>
-                <a:cs typeface="Times New Roman"/>
+                <a:cs typeface="Times New Roman" panose="02020603050405020304" pitchFamily="18" charset="0"/>
               </a:rPr>
               <a:t>Описание предметной области</a:t>
             </a:r>
-            <a:endParaRPr lang="ru-RU" dirty="0"/>
+            <a:endParaRPr lang="ru-RU" sz="3200" dirty="0">
+              <a:latin typeface="Times New Roman" panose="02020603050405020304" pitchFamily="18" charset="0"/>
+              <a:cs typeface="Times New Roman" panose="02020603050405020304" pitchFamily="18" charset="0"/>
+            </a:endParaRPr>
           </a:p>
         </p:txBody>
       </p:sp>
@@ -4904,6 +5447,8 @@
                 <a:solidFill>
                   <a:schemeClr val="bg1"/>
                 </a:solidFill>
+                <a:latin typeface="Times New Roman" panose="02020603050405020304" pitchFamily="18" charset="0"/>
+                <a:cs typeface="Times New Roman" panose="02020603050405020304" pitchFamily="18" charset="0"/>
               </a:rPr>
               <a:pPr/>
               <a:t>3</a:t>
@@ -4912,6 +5457,8 @@
               <a:solidFill>
                 <a:schemeClr val="bg1"/>
               </a:solidFill>
+              <a:latin typeface="Times New Roman" panose="02020603050405020304" pitchFamily="18" charset="0"/>
+              <a:cs typeface="Times New Roman" panose="02020603050405020304" pitchFamily="18" charset="0"/>
             </a:endParaRPr>
           </a:p>
         </p:txBody>
@@ -4931,28 +5478,28 @@
           <p:nvPr>
             <p:extLst>
               <p:ext uri="{D42A27DB-BD31-4B8C-83A1-F6EECF244321}">
-                <p14:modId xmlns:p14="http://schemas.microsoft.com/office/powerpoint/2010/main" val="1970054675"/>
+                <p14:modId xmlns:p14="http://schemas.microsoft.com/office/powerpoint/2010/main" val="2342205638"/>
               </p:ext>
             </p:extLst>
           </p:nvPr>
         </p:nvGraphicFramePr>
         <p:xfrm>
-          <a:off x="4759890" y="4380935"/>
-          <a:ext cx="7586598" cy="1851660"/>
+          <a:off x="636257" y="3960962"/>
+          <a:ext cx="11035193" cy="2466470"/>
         </p:xfrm>
         <a:graphic>
           <a:graphicData uri="http://schemas.openxmlformats.org/drawingml/2006/table">
             <a:tbl>
               <a:tblPr/>
               <a:tblGrid>
-                <a:gridCol w="3793299">
+                <a:gridCol w="3469845">
                   <a:extLst>
                     <a:ext uri="{9D8B030D-6E8A-4147-A177-3AD203B41FA5}">
                       <a16:colId xmlns:a16="http://schemas.microsoft.com/office/drawing/2014/main" val="2219828079"/>
                     </a:ext>
                   </a:extLst>
                 </a:gridCol>
-                <a:gridCol w="3793299">
+                <a:gridCol w="7565348">
                   <a:extLst>
                     <a:ext uri="{9D8B030D-6E8A-4147-A177-3AD203B41FA5}">
                       <a16:colId xmlns:a16="http://schemas.microsoft.com/office/drawing/2014/main" val="2150848850"/>
@@ -4960,7 +5507,7 @@
                   </a:extLst>
                 </a:gridCol>
               </a:tblGrid>
-              <a:tr h="0">
+              <a:tr h="1068364">
                 <a:tc>
                   <a:txBody>
                     <a:bodyPr/>
@@ -5046,7 +5593,7 @@
                   </a:ext>
                 </a:extLst>
               </a:tr>
-              <a:tr h="0">
+              <a:tr h="699053">
                 <a:tc>
                   <a:txBody>
                     <a:bodyPr/>
@@ -5132,7 +5679,7 @@
                   </a:ext>
                 </a:extLst>
               </a:tr>
-              <a:tr h="0">
+              <a:tr h="699053">
                 <a:tc>
                   <a:txBody>
                     <a:bodyPr/>
@@ -5276,15 +5823,17 @@
         </p:spPr>
         <p:txBody>
           <a:bodyPr>
-            <a:normAutofit/>
+            <a:noAutofit/>
           </a:bodyPr>
           <a:lstStyle/>
           <a:p>
             <a:r>
-              <a:rPr lang="ru-RU" sz="2800" dirty="0">
+              <a:rPr lang="ru-RU" sz="3200" dirty="0">
                 <a:solidFill>
                   <a:schemeClr val="bg1"/>
                 </a:solidFill>
+                <a:latin typeface="Times New Roman" panose="02020603050405020304" pitchFamily="18" charset="0"/>
+                <a:cs typeface="Times New Roman" panose="02020603050405020304" pitchFamily="18" charset="0"/>
               </a:rPr>
               <a:t>Анализ существующих аналогов</a:t>
             </a:r>
@@ -5315,7 +5864,7 @@
         </p:blipFill>
         <p:spPr>
           <a:xfrm>
-            <a:off x="1100204" y="2088159"/>
+            <a:off x="1286635" y="2158668"/>
             <a:ext cx="4505194" cy="2522908"/>
           </a:xfrm>
         </p:spPr>
@@ -5338,7 +5887,7 @@
         </p:nvSpPr>
         <p:spPr>
           <a:xfrm>
-            <a:off x="8917488" y="6492875"/>
+            <a:off x="9448800" y="6492875"/>
             <a:ext cx="2743200" cy="365125"/>
           </a:xfrm>
         </p:spPr>
@@ -5347,18 +5896,22 @@
           <a:lstStyle/>
           <a:p>
             <a:fld id="{D57F1E4F-1CFF-5643-939E-217C01CDF565}" type="slidenum">
-              <a:rPr lang="en-US" sz="1600" smtClean="0">
+              <a:rPr lang="en-US" sz="1800" smtClean="0">
                 <a:solidFill>
                   <a:schemeClr val="bg1"/>
                 </a:solidFill>
+                <a:latin typeface="Times New Roman" panose="02020603050405020304" pitchFamily="18" charset="0"/>
+                <a:cs typeface="Times New Roman" panose="02020603050405020304" pitchFamily="18" charset="0"/>
               </a:rPr>
               <a:pPr/>
               <a:t>4</a:t>
             </a:fld>
-            <a:endParaRPr lang="en-US" sz="1600" dirty="0">
+            <a:endParaRPr lang="en-US" sz="1800" dirty="0">
               <a:solidFill>
                 <a:schemeClr val="bg1"/>
               </a:solidFill>
+              <a:latin typeface="Times New Roman" panose="02020603050405020304" pitchFamily="18" charset="0"/>
+              <a:cs typeface="Times New Roman" panose="02020603050405020304" pitchFamily="18" charset="0"/>
             </a:endParaRPr>
           </a:p>
         </p:txBody>
@@ -5385,7 +5938,7 @@
         </p:blipFill>
         <p:spPr>
           <a:xfrm>
-            <a:off x="7179503" y="1901040"/>
+            <a:off x="6797763" y="1892162"/>
             <a:ext cx="3317308" cy="3055920"/>
           </a:xfrm>
           <a:prstGeom prst="rect">
@@ -5423,15 +5976,89 @@
           <a:chExt cx="0" cy="0"/>
         </a:xfrm>
       </p:grpSpPr>
+      <p:sp>
+        <p:nvSpPr>
+          <p:cNvPr id="5" name="Прямоугольник 4"/>
+          <p:cNvSpPr/>
+          <p:nvPr/>
+        </p:nvSpPr>
+        <p:spPr>
+          <a:xfrm>
+            <a:off x="825500" y="-38100"/>
+            <a:ext cx="6096000" cy="954107"/>
+          </a:xfrm>
+          <a:prstGeom prst="rect">
+            <a:avLst/>
+          </a:prstGeom>
+        </p:spPr>
+        <p:txBody>
+          <a:bodyPr>
+            <a:spAutoFit/>
+          </a:bodyPr>
+          <a:lstStyle/>
+          <a:p>
+            <a:r>
+              <a:rPr lang="ru-RU" sz="2800" dirty="0">
+                <a:solidFill>
+                  <a:schemeClr val="bg1"/>
+                </a:solidFill>
+                <a:latin typeface="Times New Roman" panose="02020603050405020304" pitchFamily="18" charset="0"/>
+                <a:ea typeface="Verdana"/>
+                <a:cs typeface="Times New Roman" panose="02020603050405020304" pitchFamily="18" charset="0"/>
+              </a:rPr>
+              <a:t>Инструментальные и системные программные средства</a:t>
+            </a:r>
+            <a:endParaRPr lang="ru-RU" sz="2800" dirty="0">
+              <a:latin typeface="Times New Roman" panose="02020603050405020304" pitchFamily="18" charset="0"/>
+              <a:cs typeface="Times New Roman" panose="02020603050405020304" pitchFamily="18" charset="0"/>
+            </a:endParaRPr>
+          </a:p>
+        </p:txBody>
+      </p:sp>
+      <p:sp>
+        <p:nvSpPr>
+          <p:cNvPr id="11" name="Номер слайда 10"/>
+          <p:cNvSpPr>
+            <a:spLocks noGrp="1"/>
+          </p:cNvSpPr>
+          <p:nvPr>
+            <p:ph type="sldNum" sz="quarter" idx="12"/>
+          </p:nvPr>
+        </p:nvSpPr>
+        <p:spPr>
+          <a:xfrm>
+            <a:off x="9441403" y="6492875"/>
+            <a:ext cx="2743200" cy="365125"/>
+          </a:xfrm>
+        </p:spPr>
+        <p:txBody>
+          <a:bodyPr/>
+          <a:lstStyle/>
+          <a:p>
+            <a:fld id="{D57F1E4F-1CFF-5643-939E-217C01CDF565}" type="slidenum">
+              <a:rPr lang="en-US" sz="1600" smtClean="0">
+                <a:solidFill>
+                  <a:schemeClr val="bg1"/>
+                </a:solidFill>
+                <a:latin typeface="Times New Roman" panose="02020603050405020304" pitchFamily="18" charset="0"/>
+                <a:cs typeface="Times New Roman" panose="02020603050405020304" pitchFamily="18" charset="0"/>
+              </a:rPr>
+              <a:pPr/>
+              <a:t>5</a:t>
+            </a:fld>
+            <a:endParaRPr lang="en-US" dirty="0">
+              <a:solidFill>
+                <a:schemeClr val="bg1"/>
+              </a:solidFill>
+              <a:latin typeface="Times New Roman" panose="02020603050405020304" pitchFamily="18" charset="0"/>
+              <a:cs typeface="Times New Roman" panose="02020603050405020304" pitchFamily="18" charset="0"/>
+            </a:endParaRPr>
+          </a:p>
+        </p:txBody>
+      </p:sp>
       <p:pic>
         <p:nvPicPr>
-          <p:cNvPr id="4" name="Рисунок 3">
-            <a:extLst>
-              <a:ext uri="{FF2B5EF4-FFF2-40B4-BE49-F238E27FC236}">
-                <a16:creationId xmlns:a16="http://schemas.microsoft.com/office/drawing/2014/main" id="{AE29852B-3D3C-4853-846D-BE5633367EA7}"/>
-              </a:ext>
-            </a:extLst>
-          </p:cNvPr>
+          <p:cNvPr id="2" name="Рисунок 1"/>
           <p:cNvPicPr>
             <a:picLocks noChangeAspect="1"/>
           </p:cNvPicPr>
@@ -5445,59 +6072,17 @@
         </p:blipFill>
         <p:spPr>
           <a:xfrm>
-            <a:off x="228600" y="1381406"/>
-            <a:ext cx="4563818" cy="4563818"/>
+            <a:off x="1033508" y="2676918"/>
+            <a:ext cx="5354176" cy="1793831"/>
           </a:xfrm>
           <a:prstGeom prst="rect">
             <a:avLst/>
           </a:prstGeom>
         </p:spPr>
       </p:pic>
-      <p:sp>
-        <p:nvSpPr>
-          <p:cNvPr id="5" name="Прямоугольник 4"/>
-          <p:cNvSpPr/>
-          <p:nvPr/>
-        </p:nvSpPr>
-        <p:spPr>
-          <a:xfrm>
-            <a:off x="838200" y="122003"/>
-            <a:ext cx="6096000" cy="646331"/>
-          </a:xfrm>
-          <a:prstGeom prst="rect">
-            <a:avLst/>
-          </a:prstGeom>
-        </p:spPr>
-        <p:txBody>
-          <a:bodyPr>
-            <a:spAutoFit/>
-          </a:bodyPr>
-          <a:lstStyle/>
-          <a:p>
-            <a:r>
-              <a:rPr lang="ru-RU" b="1" dirty="0">
-                <a:solidFill>
-                  <a:schemeClr val="bg1"/>
-                </a:solidFill>
-                <a:latin typeface="Verdana"/>
-                <a:ea typeface="Verdana"/>
-                <a:cs typeface="Times New Roman"/>
-              </a:rPr>
-              <a:t>Инструментальные и системные программные средства</a:t>
-            </a:r>
-            <a:endParaRPr lang="ru-RU" dirty="0"/>
-          </a:p>
-        </p:txBody>
-      </p:sp>
       <p:pic>
         <p:nvPicPr>
-          <p:cNvPr id="7" name="Picture 8" descr="Picture background">
-            <a:extLst>
-              <a:ext uri="{FF2B5EF4-FFF2-40B4-BE49-F238E27FC236}">
-                <a16:creationId xmlns:a16="http://schemas.microsoft.com/office/drawing/2014/main" id="{AEEB2B62-F05B-48A6-B151-90A0AED4D2E8}"/>
-              </a:ext>
-            </a:extLst>
-          </p:cNvPr>
+          <p:cNvPr id="1026" name="Picture 2" descr="Microsoft sql server: преимущества и недостатки - Новости Южно Сахалинска -  astv.ru"/>
           <p:cNvPicPr>
             <a:picLocks noChangeAspect="1" noChangeArrowheads="1"/>
           </p:cNvPicPr>
@@ -5518,8 +6103,8 @@
         </p:blipFill>
         <p:spPr bwMode="auto">
           <a:xfrm>
-            <a:off x="4174874" y="1296522"/>
-            <a:ext cx="4762496" cy="2677247"/>
+            <a:off x="7515164" y="2233751"/>
+            <a:ext cx="3297839" cy="2680166"/>
           </a:xfrm>
           <a:prstGeom prst="rect">
             <a:avLst/>
@@ -5536,67 +6121,6 @@
           </a:extLst>
         </p:spPr>
       </p:pic>
-      <p:pic>
-        <p:nvPicPr>
-          <p:cNvPr id="10" name="Рисунок 9"/>
-          <p:cNvPicPr>
-            <a:picLocks noChangeAspect="1"/>
-          </p:cNvPicPr>
-          <p:nvPr/>
-        </p:nvPicPr>
-        <p:blipFill>
-          <a:blip r:embed="rId4"/>
-          <a:stretch>
-            <a:fillRect/>
-          </a:stretch>
-        </p:blipFill>
-        <p:spPr>
-          <a:xfrm>
-            <a:off x="9138248" y="3012688"/>
-            <a:ext cx="2110264" cy="2722016"/>
-          </a:xfrm>
-          <a:prstGeom prst="rect">
-            <a:avLst/>
-          </a:prstGeom>
-        </p:spPr>
-      </p:pic>
-      <p:sp>
-        <p:nvSpPr>
-          <p:cNvPr id="11" name="Номер слайда 10"/>
-          <p:cNvSpPr>
-            <a:spLocks noGrp="1"/>
-          </p:cNvSpPr>
-          <p:nvPr>
-            <p:ph type="sldNum" sz="quarter" idx="12"/>
-          </p:nvPr>
-        </p:nvSpPr>
-        <p:spPr>
-          <a:xfrm>
-            <a:off x="9079282" y="6492875"/>
-            <a:ext cx="2743200" cy="365125"/>
-          </a:xfrm>
-        </p:spPr>
-        <p:txBody>
-          <a:bodyPr/>
-          <a:lstStyle/>
-          <a:p>
-            <a:fld id="{D57F1E4F-1CFF-5643-939E-217C01CDF565}" type="slidenum">
-              <a:rPr lang="en-US" sz="1600" smtClean="0">
-                <a:solidFill>
-                  <a:schemeClr val="bg1"/>
-                </a:solidFill>
-              </a:rPr>
-              <a:pPr/>
-              <a:t>5</a:t>
-            </a:fld>
-            <a:endParaRPr lang="en-US" dirty="0">
-              <a:solidFill>
-                <a:schemeClr val="bg1"/>
-              </a:solidFill>
-            </a:endParaRPr>
-          </a:p>
-        </p:txBody>
-      </p:sp>
     </p:spTree>
     <p:extLst>
       <p:ext uri="{BB962C8B-B14F-4D97-AF65-F5344CB8AC3E}">
@@ -5645,8 +6169,8 @@
         </p:nvSpPr>
         <p:spPr>
           <a:xfrm>
-            <a:off x="825674" y="-67023"/>
-            <a:ext cx="5468655" cy="1325563"/>
+            <a:off x="889000" y="0"/>
+            <a:ext cx="5557729" cy="879823"/>
           </a:xfrm>
         </p:spPr>
         <p:txBody>
@@ -5656,17 +6180,20 @@
           <a:lstStyle/>
           <a:p>
             <a:r>
-              <a:rPr lang="ru-RU" sz="2800" b="1" dirty="0">
+              <a:rPr lang="ru-RU" sz="2800" dirty="0">
                 <a:solidFill>
                   <a:schemeClr val="bg1"/>
                 </a:solidFill>
-                <a:latin typeface="Verdana"/>
+                <a:latin typeface="Times New Roman" panose="02020603050405020304" pitchFamily="18" charset="0"/>
                 <a:ea typeface="Verdana"/>
-                <a:cs typeface="Times New Roman"/>
+                <a:cs typeface="Times New Roman" panose="02020603050405020304" pitchFamily="18" charset="0"/>
               </a:rPr>
               <a:t>Проектирование ПО информационной системы</a:t>
             </a:r>
-            <a:endParaRPr lang="ru-RU" sz="2800" dirty="0"/>
+            <a:endParaRPr lang="ru-RU" sz="2800" dirty="0">
+              <a:latin typeface="Times New Roman" panose="02020603050405020304" pitchFamily="18" charset="0"/>
+              <a:cs typeface="Times New Roman" panose="02020603050405020304" pitchFamily="18" charset="0"/>
+            </a:endParaRPr>
           </a:p>
         </p:txBody>
       </p:sp>
@@ -5688,7 +6215,7 @@
         </p:nvSpPr>
         <p:spPr>
           <a:xfrm>
-            <a:off x="8616863" y="6486003"/>
+            <a:off x="9448800" y="6492875"/>
             <a:ext cx="2743200" cy="365125"/>
           </a:xfrm>
         </p:spPr>
@@ -5701,6 +6228,8 @@
                 <a:solidFill>
                   <a:schemeClr val="bg1"/>
                 </a:solidFill>
+                <a:latin typeface="Times New Roman" panose="02020603050405020304" pitchFamily="18" charset="0"/>
+                <a:cs typeface="Times New Roman" panose="02020603050405020304" pitchFamily="18" charset="0"/>
               </a:rPr>
               <a:pPr/>
               <a:t>6</a:t>
@@ -5709,6 +6238,8 @@
               <a:solidFill>
                 <a:schemeClr val="bg1"/>
               </a:solidFill>
+              <a:latin typeface="Times New Roman" panose="02020603050405020304" pitchFamily="18" charset="0"/>
+              <a:cs typeface="Times New Roman" panose="02020603050405020304" pitchFamily="18" charset="0"/>
             </a:endParaRPr>
           </a:p>
         </p:txBody>
@@ -5744,8 +6275,8 @@
         </p:blipFill>
         <p:spPr bwMode="auto">
           <a:xfrm>
-            <a:off x="1371600" y="1304446"/>
-            <a:ext cx="7983254" cy="5051904"/>
+            <a:off x="1333471" y="931522"/>
+            <a:ext cx="8432376" cy="5336114"/>
           </a:xfrm>
           <a:prstGeom prst="rect">
             <a:avLst/>
@@ -5794,53 +6325,56 @@
         </p:nvSpPr>
         <p:spPr>
           <a:xfrm>
-            <a:off x="660300" y="228418"/>
-            <a:ext cx="4262705" cy="369332"/>
+            <a:off x="685700" y="25975"/>
+            <a:ext cx="5511900" cy="584775"/>
           </a:xfrm>
           <a:prstGeom prst="rect">
             <a:avLst/>
           </a:prstGeom>
         </p:spPr>
         <p:txBody>
-          <a:bodyPr wrap="none">
+          <a:bodyPr wrap="square">
             <a:spAutoFit/>
           </a:bodyPr>
           <a:lstStyle/>
           <a:p>
             <a:r>
-              <a:rPr lang="ru-RU" b="1" dirty="0">
+              <a:rPr lang="ru-RU" sz="3100" dirty="0">
                 <a:solidFill>
                   <a:schemeClr val="bg1"/>
                 </a:solidFill>
-                <a:latin typeface="Verdana"/>
+                <a:latin typeface="Times New Roman" panose="02020603050405020304" pitchFamily="18" charset="0"/>
                 <a:ea typeface="Verdana"/>
-                <a:cs typeface="Times New Roman"/>
+                <a:cs typeface="Times New Roman" panose="02020603050405020304" pitchFamily="18" charset="0"/>
               </a:rPr>
               <a:t>Функции </a:t>
             </a:r>
             <a:r>
-              <a:rPr lang="en-US" b="1" dirty="0">
+              <a:rPr lang="en-US" sz="3100" dirty="0">
                 <a:solidFill>
                   <a:schemeClr val="bg1"/>
                 </a:solidFill>
-                <a:latin typeface="Verdana"/>
+                <a:latin typeface="Times New Roman" panose="02020603050405020304" pitchFamily="18" charset="0"/>
                 <a:ea typeface="Verdana"/>
-                <a:cs typeface="Times New Roman"/>
+                <a:cs typeface="Times New Roman" panose="02020603050405020304" pitchFamily="18" charset="0"/>
               </a:rPr>
               <a:t>desktop </a:t>
             </a:r>
             <a:r>
-              <a:rPr lang="ru-RU" b="1" dirty="0">
+              <a:rPr lang="ru-RU" sz="3100" dirty="0">
                 <a:solidFill>
                   <a:schemeClr val="bg1"/>
                 </a:solidFill>
-                <a:latin typeface="Verdana"/>
+                <a:latin typeface="Times New Roman" panose="02020603050405020304" pitchFamily="18" charset="0"/>
                 <a:ea typeface="Verdana"/>
-                <a:cs typeface="Times New Roman"/>
+                <a:cs typeface="Times New Roman" panose="02020603050405020304" pitchFamily="18" charset="0"/>
               </a:rPr>
               <a:t>приложения</a:t>
             </a:r>
-            <a:endParaRPr lang="ru-RU" dirty="0"/>
+            <a:endParaRPr lang="ru-RU" sz="3100" dirty="0">
+              <a:latin typeface="Times New Roman" panose="02020603050405020304" pitchFamily="18" charset="0"/>
+              <a:cs typeface="Times New Roman" panose="02020603050405020304" pitchFamily="18" charset="0"/>
+            </a:endParaRPr>
           </a:p>
         </p:txBody>
       </p:sp>
@@ -5853,7 +6387,7 @@
           <p:nvPr>
             <p:extLst>
               <p:ext uri="{D42A27DB-BD31-4B8C-83A1-F6EECF244321}">
-                <p14:modId xmlns:p14="http://schemas.microsoft.com/office/powerpoint/2010/main" val="1150143940"/>
+                <p14:modId xmlns:p14="http://schemas.microsoft.com/office/powerpoint/2010/main" val="238351691"/>
               </p:ext>
             </p:extLst>
           </p:nvPr>
@@ -5869,14 +6403,14 @@
                 <a:tableStyleId>{5C22544A-7EE6-4342-B048-85BDC9FD1C3A}</a:tableStyleId>
               </a:tblPr>
               <a:tblGrid>
-                <a:gridCol w="1998927">
+                <a:gridCol w="1537237">
                   <a:extLst>
                     <a:ext uri="{9D8B030D-6E8A-4147-A177-3AD203B41FA5}">
                       <a16:colId xmlns:a16="http://schemas.microsoft.com/office/drawing/2014/main" val="2793986795"/>
                     </a:ext>
                   </a:extLst>
                 </a:gridCol>
-                <a:gridCol w="5958337">
+                <a:gridCol w="6420027">
                   <a:extLst>
                     <a:ext uri="{9D8B030D-6E8A-4147-A177-3AD203B41FA5}">
                       <a16:colId xmlns:a16="http://schemas.microsoft.com/office/drawing/2014/main" val="56881690"/>
@@ -5891,7 +6425,10 @@
                     <a:lstStyle/>
                     <a:p>
                       <a:r>
-                        <a:rPr lang="ru-RU" dirty="0"/>
+                        <a:rPr lang="ru-RU" dirty="0">
+                          <a:latin typeface="Times New Roman" panose="02020603050405020304" pitchFamily="18" charset="0"/>
+                          <a:cs typeface="Times New Roman" panose="02020603050405020304" pitchFamily="18" charset="0"/>
+                        </a:rPr>
                         <a:t>№</a:t>
                       </a:r>
                     </a:p>
@@ -5909,13 +6446,16 @@
                             <a:schemeClr val="lt1"/>
                           </a:solidFill>
                           <a:effectLst/>
-                          <a:latin typeface="+mn-lt"/>
+                          <a:latin typeface="Times New Roman" panose="02020603050405020304" pitchFamily="18" charset="0"/>
                           <a:ea typeface="+mn-ea"/>
-                          <a:cs typeface="+mn-cs"/>
+                          <a:cs typeface="Times New Roman" panose="02020603050405020304" pitchFamily="18" charset="0"/>
                         </a:rPr>
                         <a:t>Функция</a:t>
                       </a:r>
-                      <a:endParaRPr lang="ru-RU" dirty="0"/>
+                      <a:endParaRPr lang="ru-RU" dirty="0">
+                        <a:latin typeface="Times New Roman" panose="02020603050405020304" pitchFamily="18" charset="0"/>
+                        <a:cs typeface="Times New Roman" panose="02020603050405020304" pitchFamily="18" charset="0"/>
+                      </a:endParaRPr>
                     </a:p>
                   </a:txBody>
                   <a:tcPr/>
@@ -5939,9 +6479,9 @@
                             <a:schemeClr val="dk1"/>
                           </a:solidFill>
                           <a:effectLst/>
-                          <a:latin typeface="quote-cjk-patch"/>
+                          <a:latin typeface="Times New Roman" panose="02020603050405020304" pitchFamily="18" charset="0"/>
                           <a:ea typeface="+mn-ea"/>
-                          <a:cs typeface="+mn-cs"/>
+                          <a:cs typeface="Times New Roman" panose="02020603050405020304" pitchFamily="18" charset="0"/>
                         </a:rPr>
                         <a:t>1</a:t>
                       </a:r>
@@ -5961,12 +6501,33 @@
                             <a:schemeClr val="dk1"/>
                           </a:solidFill>
                           <a:effectLst/>
-                          <a:latin typeface="quote-cjk-patch"/>
+                          <a:latin typeface="Times New Roman" panose="02020603050405020304" pitchFamily="18" charset="0"/>
                           <a:ea typeface="+mn-ea"/>
-                          <a:cs typeface="+mn-cs"/>
+                          <a:cs typeface="Times New Roman" panose="02020603050405020304" pitchFamily="18" charset="0"/>
                         </a:rPr>
-                        <a:t>Просмотр каталога с фильтрацией п</a:t>
+                        <a:t>Просмотр каталога с фильтрацией </a:t>
                       </a:r>
+                      <a:r>
+                        <a:rPr lang="ru-RU" sz="1800" b="0" kern="1200" dirty="0" smtClean="0">
+                          <a:solidFill>
+                            <a:schemeClr val="dk1"/>
+                          </a:solidFill>
+                          <a:effectLst/>
+                          <a:latin typeface="Times New Roman" panose="02020603050405020304" pitchFamily="18" charset="0"/>
+                          <a:ea typeface="+mn-ea"/>
+                          <a:cs typeface="Times New Roman" panose="02020603050405020304" pitchFamily="18" charset="0"/>
+                        </a:rPr>
+                        <a:t>и поиском</a:t>
+                      </a:r>
+                      <a:endParaRPr lang="ru-RU" sz="1800" b="0" kern="1200" dirty="0">
+                        <a:solidFill>
+                          <a:schemeClr val="dk1"/>
+                        </a:solidFill>
+                        <a:effectLst/>
+                        <a:latin typeface="Times New Roman" panose="02020603050405020304" pitchFamily="18" charset="0"/>
+                        <a:ea typeface="+mn-ea"/>
+                        <a:cs typeface="Times New Roman" panose="02020603050405020304" pitchFamily="18" charset="0"/>
+                      </a:endParaRPr>
                     </a:p>
                   </a:txBody>
                   <a:tcPr marL="152400" marT="95250" marB="95250" anchor="ctr"/>
@@ -5990,9 +6551,9 @@
                             <a:schemeClr val="dk1"/>
                           </a:solidFill>
                           <a:effectLst/>
-                          <a:latin typeface="quote-cjk-patch"/>
+                          <a:latin typeface="Times New Roman" panose="02020603050405020304" pitchFamily="18" charset="0"/>
                           <a:ea typeface="+mn-ea"/>
-                          <a:cs typeface="+mn-cs"/>
+                          <a:cs typeface="Times New Roman" panose="02020603050405020304" pitchFamily="18" charset="0"/>
                         </a:rPr>
                         <a:t>2</a:t>
                       </a:r>
@@ -6012,9 +6573,9 @@
                             <a:schemeClr val="dk1"/>
                           </a:solidFill>
                           <a:effectLst/>
-                          <a:latin typeface="quote-cjk-patch"/>
+                          <a:latin typeface="Times New Roman" panose="02020603050405020304" pitchFamily="18" charset="0"/>
                           <a:ea typeface="+mn-ea"/>
-                          <a:cs typeface="+mn-cs"/>
+                          <a:cs typeface="Times New Roman" panose="02020603050405020304" pitchFamily="18" charset="0"/>
                         </a:rPr>
                         <a:t>Поиск товаров</a:t>
                       </a:r>
@@ -6024,9 +6585,9 @@
                             <a:schemeClr val="dk1"/>
                           </a:solidFill>
                           <a:effectLst/>
-                          <a:latin typeface="quote-cjk-patch"/>
+                          <a:latin typeface="Times New Roman" panose="02020603050405020304" pitchFamily="18" charset="0"/>
                           <a:ea typeface="+mn-ea"/>
-                          <a:cs typeface="+mn-cs"/>
+                          <a:cs typeface="Times New Roman" panose="02020603050405020304" pitchFamily="18" charset="0"/>
                         </a:rPr>
                         <a:t> </a:t>
                       </a:r>
@@ -6036,9 +6597,9 @@
                             <a:schemeClr val="dk1"/>
                           </a:solidFill>
                           <a:effectLst/>
-                          <a:latin typeface="quote-cjk-patch"/>
+                          <a:latin typeface="Times New Roman" panose="02020603050405020304" pitchFamily="18" charset="0"/>
                           <a:ea typeface="+mn-ea"/>
-                          <a:cs typeface="+mn-cs"/>
+                          <a:cs typeface="Times New Roman" panose="02020603050405020304" pitchFamily="18" charset="0"/>
                         </a:rPr>
                         <a:t>по названию и описанию</a:t>
                       </a:r>
@@ -6065,9 +6626,9 @@
                             <a:schemeClr val="dk1"/>
                           </a:solidFill>
                           <a:effectLst/>
-                          <a:latin typeface="quote-cjk-patch"/>
+                          <a:latin typeface="Times New Roman" panose="02020603050405020304" pitchFamily="18" charset="0"/>
                           <a:ea typeface="+mn-ea"/>
-                          <a:cs typeface="+mn-cs"/>
+                          <a:cs typeface="Times New Roman" panose="02020603050405020304" pitchFamily="18" charset="0"/>
                         </a:rPr>
                         <a:t>3</a:t>
                       </a:r>
@@ -6087,9 +6648,9 @@
                             <a:schemeClr val="dk1"/>
                           </a:solidFill>
                           <a:effectLst/>
-                          <a:latin typeface="quote-cjk-patch"/>
+                          <a:latin typeface="Times New Roman" panose="02020603050405020304" pitchFamily="18" charset="0"/>
                           <a:ea typeface="+mn-ea"/>
-                          <a:cs typeface="+mn-cs"/>
+                          <a:cs typeface="Times New Roman" panose="02020603050405020304" pitchFamily="18" charset="0"/>
                         </a:rPr>
                         <a:t>Сортировка товаров</a:t>
                       </a:r>
@@ -6099,9 +6660,9 @@
                             <a:schemeClr val="dk1"/>
                           </a:solidFill>
                           <a:effectLst/>
-                          <a:latin typeface="quote-cjk-patch"/>
+                          <a:latin typeface="Times New Roman" panose="02020603050405020304" pitchFamily="18" charset="0"/>
                           <a:ea typeface="+mn-ea"/>
-                          <a:cs typeface="+mn-cs"/>
+                          <a:cs typeface="Times New Roman" panose="02020603050405020304" pitchFamily="18" charset="0"/>
                         </a:rPr>
                         <a:t> </a:t>
                       </a:r>
@@ -6111,9 +6672,9 @@
                             <a:schemeClr val="dk1"/>
                           </a:solidFill>
                           <a:effectLst/>
-                          <a:latin typeface="quote-cjk-patch"/>
+                          <a:latin typeface="Times New Roman" panose="02020603050405020304" pitchFamily="18" charset="0"/>
                           <a:ea typeface="+mn-ea"/>
-                          <a:cs typeface="+mn-cs"/>
+                          <a:cs typeface="Times New Roman" panose="02020603050405020304" pitchFamily="18" charset="0"/>
                         </a:rPr>
                         <a:t>(по цене, алфавиту, популярности)</a:t>
                       </a:r>
@@ -6140,9 +6701,9 @@
                             <a:schemeClr val="dk1"/>
                           </a:solidFill>
                           <a:effectLst/>
-                          <a:latin typeface="quote-cjk-patch"/>
+                          <a:latin typeface="Times New Roman" panose="02020603050405020304" pitchFamily="18" charset="0"/>
                           <a:ea typeface="+mn-ea"/>
-                          <a:cs typeface="+mn-cs"/>
+                          <a:cs typeface="Times New Roman" panose="02020603050405020304" pitchFamily="18" charset="0"/>
                         </a:rPr>
                         <a:t>4</a:t>
                       </a:r>
@@ -6162,9 +6723,9 @@
                             <a:schemeClr val="dk1"/>
                           </a:solidFill>
                           <a:effectLst/>
-                          <a:latin typeface="quote-cjk-patch"/>
+                          <a:latin typeface="Times New Roman" panose="02020603050405020304" pitchFamily="18" charset="0"/>
                           <a:ea typeface="+mn-ea"/>
-                          <a:cs typeface="+mn-cs"/>
+                          <a:cs typeface="Times New Roman" panose="02020603050405020304" pitchFamily="18" charset="0"/>
                         </a:rPr>
                         <a:t>Регистрация и авторизация пользователей</a:t>
                       </a:r>
@@ -6191,9 +6752,9 @@
                             <a:schemeClr val="dk1"/>
                           </a:solidFill>
                           <a:effectLst/>
-                          <a:latin typeface="quote-cjk-patch"/>
+                          <a:latin typeface="Times New Roman" panose="02020603050405020304" pitchFamily="18" charset="0"/>
                           <a:ea typeface="+mn-ea"/>
-                          <a:cs typeface="+mn-cs"/>
+                          <a:cs typeface="Times New Roman" panose="02020603050405020304" pitchFamily="18" charset="0"/>
                         </a:rPr>
                         <a:t>5</a:t>
                       </a:r>
@@ -6213,9 +6774,9 @@
                             <a:schemeClr val="dk1"/>
                           </a:solidFill>
                           <a:effectLst/>
-                          <a:latin typeface="quote-cjk-patch"/>
+                          <a:latin typeface="Times New Roman" panose="02020603050405020304" pitchFamily="18" charset="0"/>
                           <a:ea typeface="+mn-ea"/>
-                          <a:cs typeface="+mn-cs"/>
+                          <a:cs typeface="Times New Roman" panose="02020603050405020304" pitchFamily="18" charset="0"/>
                         </a:rPr>
                         <a:t>Добавление товаров корзину и формирование чека</a:t>
                       </a:r>
@@ -6242,7 +6803,7 @@
         <p:spPr>
           <a:xfrm>
             <a:off x="3224463" y="1124386"/>
-            <a:ext cx="4738861" cy="369332"/>
+            <a:ext cx="5006692" cy="369332"/>
           </a:xfrm>
           <a:prstGeom prst="rect">
             <a:avLst/>
@@ -6255,7 +6816,10 @@
           <a:lstStyle/>
           <a:p>
             <a:r>
-              <a:rPr lang="ru-RU" b="1" dirty="0"/>
+              <a:rPr lang="ru-RU" b="1" dirty="0">
+                <a:latin typeface="Times New Roman" panose="02020603050405020304" pitchFamily="18" charset="0"/>
+                <a:cs typeface="Times New Roman" panose="02020603050405020304" pitchFamily="18" charset="0"/>
+              </a:rPr>
               <a:t>Функции веб-приложения (клиентская часть)</a:t>
             </a:r>
           </a:p>
@@ -6273,7 +6837,7 @@
         </p:nvSpPr>
         <p:spPr>
           <a:xfrm>
-            <a:off x="8872603" y="6492875"/>
+            <a:off x="9448800" y="6498789"/>
             <a:ext cx="2743200" cy="365125"/>
           </a:xfrm>
         </p:spPr>
@@ -6286,6 +6850,8 @@
                 <a:solidFill>
                   <a:schemeClr val="bg1"/>
                 </a:solidFill>
+                <a:latin typeface="Times New Roman" panose="02020603050405020304" pitchFamily="18" charset="0"/>
+                <a:cs typeface="Times New Roman" panose="02020603050405020304" pitchFamily="18" charset="0"/>
               </a:rPr>
               <a:pPr/>
               <a:t>7</a:t>
@@ -6294,6 +6860,8 @@
               <a:solidFill>
                 <a:schemeClr val="bg1"/>
               </a:solidFill>
+              <a:latin typeface="Times New Roman" panose="02020603050405020304" pitchFamily="18" charset="0"/>
+              <a:cs typeface="Times New Roman" panose="02020603050405020304" pitchFamily="18" charset="0"/>
             </a:endParaRPr>
           </a:p>
         </p:txBody>
@@ -6330,13 +6898,7 @@
       </p:grpSpPr>
       <p:sp>
         <p:nvSpPr>
-          <p:cNvPr id="2" name="Заголовок 1">
-            <a:extLst>
-              <a:ext uri="{FF2B5EF4-FFF2-40B4-BE49-F238E27FC236}">
-                <a16:creationId xmlns:a16="http://schemas.microsoft.com/office/drawing/2014/main" id="{D337215C-FF62-B8D1-8CE3-ECA54CA2011B}"/>
-              </a:ext>
-            </a:extLst>
-          </p:cNvPr>
+          <p:cNvPr id="2" name="Заголовок 1"/>
           <p:cNvSpPr>
             <a:spLocks noGrp="1"/>
           </p:cNvSpPr>
@@ -6346,7 +6908,7 @@
         </p:nvSpPr>
         <p:spPr>
           <a:xfrm>
-            <a:off x="687887" y="-252413"/>
+            <a:off x="731668" y="-256312"/>
             <a:ext cx="10515600" cy="1325563"/>
           </a:xfrm>
         </p:spPr>
@@ -6355,25 +6917,28 @@
           <a:lstStyle/>
           <a:p>
             <a:r>
-              <a:rPr lang="ru-RU" dirty="0">
+              <a:rPr lang="ru-RU" dirty="0" smtClean="0">
                 <a:solidFill>
                   <a:schemeClr val="bg1"/>
                 </a:solidFill>
+                <a:latin typeface="Times New Roman" panose="02020603050405020304" pitchFamily="18" charset="0"/>
+                <a:cs typeface="Times New Roman" panose="02020603050405020304" pitchFamily="18" charset="0"/>
               </a:rPr>
               <a:t>Программа</a:t>
             </a:r>
+            <a:endParaRPr lang="ru-RU" dirty="0">
+              <a:solidFill>
+                <a:schemeClr val="bg1"/>
+              </a:solidFill>
+              <a:latin typeface="Times New Roman" panose="02020603050405020304" pitchFamily="18" charset="0"/>
+              <a:cs typeface="Times New Roman" panose="02020603050405020304" pitchFamily="18" charset="0"/>
+            </a:endParaRPr>
           </a:p>
         </p:txBody>
       </p:sp>
       <p:pic>
         <p:nvPicPr>
-          <p:cNvPr id="6" name="Объект 5">
-            <a:extLst>
-              <a:ext uri="{FF2B5EF4-FFF2-40B4-BE49-F238E27FC236}">
-                <a16:creationId xmlns:a16="http://schemas.microsoft.com/office/drawing/2014/main" id="{91BB9CE8-0729-E97F-38D9-DECCD6724E00}"/>
-              </a:ext>
-            </a:extLst>
-          </p:cNvPr>
+          <p:cNvPr id="5" name="Объект 4"/>
           <p:cNvPicPr>
             <a:picLocks noGrp="1" noChangeAspect="1"/>
           </p:cNvPicPr>
@@ -6381,16 +6946,15 @@
             <p:ph idx="1"/>
           </p:nvPr>
         </p:nvPicPr>
-        <p:blipFill>
+        <p:blipFill rotWithShape="1">
           <a:blip r:embed="rId2"/>
-          <a:stretch>
-            <a:fillRect/>
-          </a:stretch>
+          <a:srcRect l="3542" b="3221"/>
+          <a:stretch/>
         </p:blipFill>
         <p:spPr>
           <a:xfrm>
-            <a:off x="2873198" y="1253331"/>
-            <a:ext cx="6445604" cy="4351338"/>
+            <a:off x="1066443" y="916301"/>
+            <a:ext cx="4082606" cy="5468710"/>
           </a:xfrm>
           <a:prstGeom prst="rect">
             <a:avLst/>
@@ -6399,13 +6963,7 @@
       </p:pic>
       <p:sp>
         <p:nvSpPr>
-          <p:cNvPr id="4" name="Номер слайда 3">
-            <a:extLst>
-              <a:ext uri="{FF2B5EF4-FFF2-40B4-BE49-F238E27FC236}">
-                <a16:creationId xmlns:a16="http://schemas.microsoft.com/office/drawing/2014/main" id="{7A7DE575-49FD-6909-D52D-757774815436}"/>
-              </a:ext>
-            </a:extLst>
-          </p:cNvPr>
+          <p:cNvPr id="4" name="Номер слайда 3"/>
           <p:cNvSpPr>
             <a:spLocks noGrp="1"/>
           </p:cNvSpPr>
@@ -6415,7 +6973,7 @@
         </p:nvSpPr>
         <p:spPr>
           <a:xfrm>
-            <a:off x="8610600" y="6492875"/>
+            <a:off x="9448800" y="6509237"/>
             <a:ext cx="2743200" cy="365125"/>
           </a:xfrm>
         </p:spPr>
@@ -6428,6 +6986,8 @@
                 <a:solidFill>
                   <a:schemeClr val="bg1"/>
                 </a:solidFill>
+                <a:latin typeface="Times New Roman" panose="02020603050405020304" pitchFamily="18" charset="0"/>
+                <a:cs typeface="Times New Roman" panose="02020603050405020304" pitchFamily="18" charset="0"/>
               </a:rPr>
               <a:pPr/>
               <a:t>8</a:t>
@@ -6436,14 +6996,39 @@
               <a:solidFill>
                 <a:schemeClr val="bg1"/>
               </a:solidFill>
+              <a:latin typeface="Times New Roman" panose="02020603050405020304" pitchFamily="18" charset="0"/>
+              <a:cs typeface="Times New Roman" panose="02020603050405020304" pitchFamily="18" charset="0"/>
             </a:endParaRPr>
           </a:p>
         </p:txBody>
       </p:sp>
+      <p:pic>
+        <p:nvPicPr>
+          <p:cNvPr id="6" name="Рисунок 5"/>
+          <p:cNvPicPr>
+            <a:picLocks noChangeAspect="1"/>
+          </p:cNvPicPr>
+          <p:nvPr/>
+        </p:nvPicPr>
+        <p:blipFill rotWithShape="1">
+          <a:blip r:embed="rId3"/>
+          <a:srcRect l="2239"/>
+          <a:stretch/>
+        </p:blipFill>
+        <p:spPr>
+          <a:xfrm>
+            <a:off x="6489576" y="978445"/>
+            <a:ext cx="4342233" cy="5468710"/>
+          </a:xfrm>
+          <a:prstGeom prst="rect">
+            <a:avLst/>
+          </a:prstGeom>
+        </p:spPr>
+      </p:pic>
     </p:spTree>
     <p:extLst>
       <p:ext uri="{BB962C8B-B14F-4D97-AF65-F5344CB8AC3E}">
-        <p14:creationId xmlns:p14="http://schemas.microsoft.com/office/powerpoint/2010/main" val="4192974642"/>
+        <p14:creationId xmlns:p14="http://schemas.microsoft.com/office/powerpoint/2010/main" val="3148804730"/>
       </p:ext>
     </p:extLst>
   </p:cSld>
@@ -6472,13 +7057,7 @@
       </p:grpSpPr>
       <p:sp>
         <p:nvSpPr>
-          <p:cNvPr id="2" name="Заголовок 1">
-            <a:extLst>
-              <a:ext uri="{FF2B5EF4-FFF2-40B4-BE49-F238E27FC236}">
-                <a16:creationId xmlns:a16="http://schemas.microsoft.com/office/drawing/2014/main" id="{4AB3EC72-CF89-4086-3AC4-C57602E596AD}"/>
-              </a:ext>
-            </a:extLst>
-          </p:cNvPr>
+          <p:cNvPr id="2" name="Заголовок 1"/>
           <p:cNvSpPr>
             <a:spLocks noGrp="1"/>
           </p:cNvSpPr>
@@ -6488,7 +7067,7 @@
         </p:nvSpPr>
         <p:spPr>
           <a:xfrm>
-            <a:off x="731729" y="-297657"/>
+            <a:off x="731668" y="-256312"/>
             <a:ext cx="10515600" cy="1325563"/>
           </a:xfrm>
         </p:spPr>
@@ -6497,31 +7076,73 @@
           <a:lstStyle/>
           <a:p>
             <a:r>
-              <a:rPr lang="ru-RU" dirty="0">
+              <a:rPr lang="ru-RU" dirty="0" smtClean="0">
                 <a:solidFill>
                   <a:schemeClr val="bg1"/>
                 </a:solidFill>
+                <a:latin typeface="Times New Roman" panose="02020603050405020304" pitchFamily="18" charset="0"/>
+                <a:cs typeface="Times New Roman" panose="02020603050405020304" pitchFamily="18" charset="0"/>
               </a:rPr>
               <a:t>Программа</a:t>
             </a:r>
+            <a:endParaRPr lang="ru-RU" dirty="0">
+              <a:solidFill>
+                <a:schemeClr val="bg1"/>
+              </a:solidFill>
+              <a:latin typeface="Times New Roman" panose="02020603050405020304" pitchFamily="18" charset="0"/>
+              <a:cs typeface="Times New Roman" panose="02020603050405020304" pitchFamily="18" charset="0"/>
+            </a:endParaRPr>
+          </a:p>
+        </p:txBody>
+      </p:sp>
+      <p:sp>
+        <p:nvSpPr>
+          <p:cNvPr id="4" name="Номер слайда 3"/>
+          <p:cNvSpPr>
+            <a:spLocks noGrp="1"/>
+          </p:cNvSpPr>
+          <p:nvPr>
+            <p:ph type="sldNum" sz="quarter" idx="12"/>
+          </p:nvPr>
+        </p:nvSpPr>
+        <p:spPr>
+          <a:xfrm>
+            <a:off x="9448800" y="6509237"/>
+            <a:ext cx="2743200" cy="365125"/>
+          </a:xfrm>
+        </p:spPr>
+        <p:txBody>
+          <a:bodyPr/>
+          <a:lstStyle/>
+          <a:p>
+            <a:fld id="{D57F1E4F-1CFF-5643-939E-217C01CDF565}" type="slidenum">
+              <a:rPr lang="en-US" sz="1600" smtClean="0">
+                <a:solidFill>
+                  <a:schemeClr val="bg1"/>
+                </a:solidFill>
+                <a:latin typeface="Times New Roman" panose="02020603050405020304" pitchFamily="18" charset="0"/>
+                <a:cs typeface="Times New Roman" panose="02020603050405020304" pitchFamily="18" charset="0"/>
+              </a:rPr>
+              <a:pPr/>
+              <a:t>9</a:t>
+            </a:fld>
+            <a:endParaRPr lang="en-US" dirty="0">
+              <a:solidFill>
+                <a:schemeClr val="bg1"/>
+              </a:solidFill>
+              <a:latin typeface="Times New Roman" panose="02020603050405020304" pitchFamily="18" charset="0"/>
+              <a:cs typeface="Times New Roman" panose="02020603050405020304" pitchFamily="18" charset="0"/>
+            </a:endParaRPr>
           </a:p>
         </p:txBody>
       </p:sp>
       <p:pic>
         <p:nvPicPr>
-          <p:cNvPr id="6" name="Объект 5">
-            <a:extLst>
-              <a:ext uri="{FF2B5EF4-FFF2-40B4-BE49-F238E27FC236}">
-                <a16:creationId xmlns:a16="http://schemas.microsoft.com/office/drawing/2014/main" id="{D8F3A216-7209-6EE0-F562-9635AB863188}"/>
-              </a:ext>
-            </a:extLst>
-          </p:cNvPr>
+          <p:cNvPr id="10" name="Рисунок 9"/>
           <p:cNvPicPr>
-            <a:picLocks noGrp="1" noChangeAspect="1"/>
+            <a:picLocks noChangeAspect="1"/>
           </p:cNvPicPr>
-          <p:nvPr>
-            <p:ph idx="1"/>
-          </p:nvPr>
+          <p:nvPr/>
         </p:nvPicPr>
         <p:blipFill>
           <a:blip r:embed="rId2"/>
@@ -6531,61 +7152,18 @@
         </p:blipFill>
         <p:spPr>
           <a:xfrm>
-            <a:off x="2963681" y="815409"/>
-            <a:ext cx="5888858" cy="5677466"/>
+            <a:off x="731668" y="876299"/>
+            <a:ext cx="10515600" cy="5499101"/>
           </a:xfrm>
           <a:prstGeom prst="rect">
             <a:avLst/>
           </a:prstGeom>
         </p:spPr>
       </p:pic>
-      <p:sp>
-        <p:nvSpPr>
-          <p:cNvPr id="4" name="Номер слайда 3">
-            <a:extLst>
-              <a:ext uri="{FF2B5EF4-FFF2-40B4-BE49-F238E27FC236}">
-                <a16:creationId xmlns:a16="http://schemas.microsoft.com/office/drawing/2014/main" id="{80BEBF48-5AAF-C16F-9167-F3586BBE4F69}"/>
-              </a:ext>
-            </a:extLst>
-          </p:cNvPr>
-          <p:cNvSpPr>
-            <a:spLocks noGrp="1"/>
-          </p:cNvSpPr>
-          <p:nvPr>
-            <p:ph type="sldNum" sz="quarter" idx="12"/>
-          </p:nvPr>
-        </p:nvSpPr>
-        <p:spPr>
-          <a:xfrm>
-            <a:off x="8610600" y="6492875"/>
-            <a:ext cx="2743200" cy="365125"/>
-          </a:xfrm>
-        </p:spPr>
-        <p:txBody>
-          <a:bodyPr/>
-          <a:lstStyle/>
-          <a:p>
-            <a:fld id="{D57F1E4F-1CFF-5643-939E-217C01CDF565}" type="slidenum">
-              <a:rPr lang="en-US" sz="1600" smtClean="0">
-                <a:solidFill>
-                  <a:schemeClr val="bg1"/>
-                </a:solidFill>
-              </a:rPr>
-              <a:pPr/>
-              <a:t>9</a:t>
-            </a:fld>
-            <a:endParaRPr lang="en-US" sz="1600" dirty="0">
-              <a:solidFill>
-                <a:schemeClr val="bg1"/>
-              </a:solidFill>
-            </a:endParaRPr>
-          </a:p>
-        </p:txBody>
-      </p:sp>
     </p:spTree>
     <p:extLst>
       <p:ext uri="{BB962C8B-B14F-4D97-AF65-F5344CB8AC3E}">
-        <p14:creationId xmlns:p14="http://schemas.microsoft.com/office/powerpoint/2010/main" val="143751796"/>
+        <p14:creationId xmlns:p14="http://schemas.microsoft.com/office/powerpoint/2010/main" val="2323292281"/>
       </p:ext>
     </p:extLst>
   </p:cSld>
